--- a/Materials/Slides/slides_w3.pptx
+++ b/Materials/Slides/slides_w3.pptx
@@ -20,7 +20,7 @@
     <p:sldId id="569" r:id="rId8"/>
     <p:sldId id="570" r:id="rId9"/>
     <p:sldId id="571" r:id="rId10"/>
-    <p:sldId id="572" r:id="rId11"/>
+    <p:sldId id="592" r:id="rId41"/>
     <p:sldId id="573" r:id="rId12"/>
     <p:sldId id="574" r:id="rId13"/>
     <p:sldId id="575" r:id="rId14"/>
@@ -39,6 +39,8 @@
     <p:sldId id="588" r:id="rId27"/>
     <p:sldId id="589" r:id="rId28"/>
     <p:sldId id="590" r:id="rId29"/>
+    <p:sldId id="593" r:id="rId42"/>
+    <p:sldId id="594" r:id="rId43"/>
     <p:sldId id="591" r:id="rId30"/>
     <p:sldId id="354" r:id="rId31"/>
     <p:sldId id="260" r:id="rId32"/>
@@ -7201,6 +7203,216 @@
 </p:notes>
 </file>
 
+<file path=ppt/notesSlides/notesSlide23.xml><?xml version="1.0" encoding="utf-8"?>
+<p:notes xmlns:a="http://schemas.openxmlformats.org/drawingml/2006/main" xmlns:p="http://schemas.openxmlformats.org/presentationml/2006/main" xmlns:r="http://schemas.openxmlformats.org/officeDocument/2006/relationships">
+  <p:cSld>
+    <p:spTree>
+      <p:nvGrpSpPr>
+        <p:cNvPr id="1" name=""/>
+        <p:cNvGrpSpPr/>
+        <p:nvPr/>
+      </p:nvGrpSpPr>
+      <p:grpSpPr>
+        <a:xfrm>
+          <a:off x="0" y="0"/>
+          <a:ext cx="0" cy="0"/>
+          <a:chOff x="0" y="0"/>
+          <a:chExt cx="0" cy="0"/>
+        </a:xfrm>
+      </p:grpSpPr>
+      <p:sp>
+        <p:nvSpPr>
+          <p:cNvPr id="2" name="Slide Image Placeholder 1"/>
+          <p:cNvSpPr>
+            <a:spLocks noGrp="1"/>
+          </p:cNvSpPr>
+          <p:nvPr>
+            <p:ph type="sldImg" idx="2"/>
+          </p:nvPr>
+        </p:nvSpPr>
+        <p:spPr/>
+      </p:sp>
+      <p:sp>
+        <p:nvSpPr>
+          <p:cNvPr id="3" name="Notes Placeholder 2"/>
+          <p:cNvSpPr>
+            <a:spLocks noGrp="1"/>
+          </p:cNvSpPr>
+          <p:nvPr>
+            <p:ph type="body" idx="3" sz="quarter"/>
+          </p:nvPr>
+        </p:nvSpPr>
+        <p:spPr/>
+        <p:txBody>
+          <a:bodyPr/>
+          <a:lstStyle/>
+          <a:p>
+            <a:r>
+              <a:t>What JASP shows for Worksheet 3, Exercise 3.1. (1) R² = 0.441: inequality accounts for 44% of the variation in trust across the 23 countries. (2) RMSE = 12.1: the typical distance of a country from the line, in percentage points. (3) The M₀ rows belong to the null model, whose intercept is the average trust, 38.8%. (4) The M₁ rows give the line: 77.062 − 6.535 × inequality. (5) Standardized, −0.664: the slope in standard deviations; with one predictor it equals r. (6) Standard Error, t and p, and the ANOVA table that JASP prints above the coefficients, are next week's topic.</a:t>
+            </a:r>
+          </a:p>
+        </p:txBody>
+      </p:sp>
+      <p:sp>
+        <p:nvSpPr>
+          <p:cNvPr id="4" name="Slide Number Placeholder 3"/>
+          <p:cNvSpPr>
+            <a:spLocks noGrp="1"/>
+          </p:cNvSpPr>
+          <p:nvPr>
+            <p:ph type="sldNum" idx="5" sz="quarter"/>
+          </p:nvPr>
+        </p:nvSpPr>
+        <p:spPr/>
+      </p:sp>
+    </p:spTree>
+  </p:cSld>
+  <p:clrMapOvr>
+    <a:masterClrMapping/>
+  </p:clrMapOvr>
+</p:notes>
+</file>
+
+<file path=ppt/notesSlides/notesSlide24.xml><?xml version="1.0" encoding="utf-8"?>
+<p:notes xmlns:a="http://schemas.openxmlformats.org/drawingml/2006/main" xmlns:p="http://schemas.openxmlformats.org/presentationml/2006/main" xmlns:r="http://schemas.openxmlformats.org/officeDocument/2006/relationships">
+  <p:cSld>
+    <p:spTree>
+      <p:nvGrpSpPr>
+        <p:cNvPr id="1" name=""/>
+        <p:cNvGrpSpPr/>
+        <p:nvPr/>
+      </p:nvGrpSpPr>
+      <p:grpSpPr>
+        <a:xfrm>
+          <a:off x="0" y="0"/>
+          <a:ext cx="0" cy="0"/>
+          <a:chOff x="0" y="0"/>
+          <a:chExt cx="0" cy="0"/>
+        </a:xfrm>
+      </p:grpSpPr>
+      <p:sp>
+        <p:nvSpPr>
+          <p:cNvPr id="2" name="Slide Image Placeholder 1"/>
+          <p:cNvSpPr>
+            <a:spLocks noGrp="1"/>
+          </p:cNvSpPr>
+          <p:nvPr>
+            <p:ph type="sldImg" idx="2"/>
+          </p:nvPr>
+        </p:nvSpPr>
+        <p:spPr/>
+      </p:sp>
+      <p:sp>
+        <p:nvSpPr>
+          <p:cNvPr id="3" name="Notes Placeholder 2"/>
+          <p:cNvSpPr>
+            <a:spLocks noGrp="1"/>
+          </p:cNvSpPr>
+          <p:nvPr>
+            <p:ph type="body" idx="3" sz="quarter"/>
+          </p:nvPr>
+        </p:nvSpPr>
+        <p:spPr/>
+        <p:txBody>
+          <a:bodyPr/>
+          <a:lstStyle/>
+          <a:p>
+            <a:r>
+              <a:t>A results paragraph of the kind the assignment asks for: outcome and predictors with their units, the slope in words, what was held constant, R² and the limits of the data. Week 5 adds confidence intervals and p-values to the same paragraph.</a:t>
+            </a:r>
+          </a:p>
+        </p:txBody>
+      </p:sp>
+      <p:sp>
+        <p:nvSpPr>
+          <p:cNvPr id="4" name="Slide Number Placeholder 3"/>
+          <p:cNvSpPr>
+            <a:spLocks noGrp="1"/>
+          </p:cNvSpPr>
+          <p:nvPr>
+            <p:ph type="sldNum" idx="5" sz="quarter"/>
+          </p:nvPr>
+        </p:nvSpPr>
+        <p:spPr/>
+      </p:sp>
+    </p:spTree>
+  </p:cSld>
+  <p:clrMapOvr>
+    <a:masterClrMapping/>
+  </p:clrMapOvr>
+</p:notes>
+</file>
+
+<file path=ppt/notesSlides/notesSlide25.xml><?xml version="1.0" encoding="utf-8"?>
+<p:notes xmlns:a="http://schemas.openxmlformats.org/drawingml/2006/main" xmlns:p="http://schemas.openxmlformats.org/presentationml/2006/main" xmlns:r="http://schemas.openxmlformats.org/officeDocument/2006/relationships">
+  <p:cSld>
+    <p:spTree>
+      <p:nvGrpSpPr>
+        <p:cNvPr id="1" name=""/>
+        <p:cNvGrpSpPr/>
+        <p:nvPr/>
+      </p:nvGrpSpPr>
+      <p:grpSpPr>
+        <a:xfrm>
+          <a:off x="0" y="0"/>
+          <a:ext cx="0" cy="0"/>
+          <a:chOff x="0" y="0"/>
+          <a:chExt cx="0" cy="0"/>
+        </a:xfrm>
+      </p:grpSpPr>
+      <p:sp>
+        <p:nvSpPr>
+          <p:cNvPr id="2" name="Slide Image Placeholder 1"/>
+          <p:cNvSpPr>
+            <a:spLocks noGrp="1"/>
+          </p:cNvSpPr>
+          <p:nvPr>
+            <p:ph type="sldImg" idx="2"/>
+          </p:nvPr>
+        </p:nvSpPr>
+        <p:spPr/>
+      </p:sp>
+      <p:sp>
+        <p:nvSpPr>
+          <p:cNvPr id="3" name="Notes Placeholder 2"/>
+          <p:cNvSpPr>
+            <a:spLocks noGrp="1"/>
+          </p:cNvSpPr>
+          <p:nvPr>
+            <p:ph type="body" idx="3" sz="quarter"/>
+          </p:nvPr>
+        </p:nvSpPr>
+        <p:spPr/>
+        <p:txBody>
+          <a:bodyPr/>
+          <a:lstStyle/>
+          <a:p>
+            <a:r>
+              <a:t>The Week 3 Interactive Explorer page (https://cgmoreh.github.io/SOC2069-QUANT-26/Materials/Explorers/explorer_w3.html) has interactive versions of ideas from this lecture. Students can scan the code or follow the link from the course site and try the three tasks on the slide.</a:t>
+            </a:r>
+          </a:p>
+        </p:txBody>
+      </p:sp>
+      <p:sp>
+        <p:nvSpPr>
+          <p:cNvPr id="4" name="Slide Number Placeholder 3"/>
+          <p:cNvSpPr>
+            <a:spLocks noGrp="1"/>
+          </p:cNvSpPr>
+          <p:nvPr>
+            <p:ph type="sldNum" idx="5" sz="quarter"/>
+          </p:nvPr>
+        </p:nvSpPr>
+        <p:spPr/>
+      </p:sp>
+    </p:spTree>
+  </p:cSld>
+  <p:clrMapOvr>
+    <a:masterClrMapping/>
+  </p:clrMapOvr>
+</p:notes>
+</file>
+
 <file path=ppt/notesSlides/notesSlide3.xml><?xml version="1.0" encoding="utf-8"?>
 <p:notes xmlns:a="http://schemas.openxmlformats.org/drawingml/2006/main" xmlns:r="http://schemas.openxmlformats.org/officeDocument/2006/relationships" xmlns:p="http://schemas.openxmlformats.org/presentationml/2006/main">
   <p:cSld>
@@ -7527,76 +7739,6 @@
           <a:p>
             <a:r>
               <a:t>The same scatter plot as last week, now with the least-squares line. The equation is what JASP's Coefficients table reports in the Unstandardized column.</a:t>
-            </a:r>
-          </a:p>
-        </p:txBody>
-      </p:sp>
-      <p:sp>
-        <p:nvSpPr>
-          <p:cNvPr id="4" name="Slide Number Placeholder 3"/>
-          <p:cNvSpPr>
-            <a:spLocks noGrp="1"/>
-          </p:cNvSpPr>
-          <p:nvPr>
-            <p:ph type="sldNum" sz="quarter" idx="5"/>
-          </p:nvPr>
-        </p:nvSpPr>
-        <p:spPr/>
-      </p:sp>
-    </p:spTree>
-  </p:cSld>
-  <p:clrMapOvr>
-    <a:masterClrMapping/>
-  </p:clrMapOvr>
-</p:notes>
-</file>
-
-<file path=ppt/notesSlides/notesSlide8.xml><?xml version="1.0" encoding="utf-8"?>
-<p:notes xmlns:a="http://schemas.openxmlformats.org/drawingml/2006/main" xmlns:r="http://schemas.openxmlformats.org/officeDocument/2006/relationships" xmlns:p="http://schemas.openxmlformats.org/presentationml/2006/main">
-  <p:cSld>
-    <p:spTree>
-      <p:nvGrpSpPr>
-        <p:cNvPr id="1" name=""/>
-        <p:cNvGrpSpPr/>
-        <p:nvPr/>
-      </p:nvGrpSpPr>
-      <p:grpSpPr>
-        <a:xfrm>
-          <a:off x="0" y="0"/>
-          <a:ext cx="0" cy="0"/>
-          <a:chOff x="0" y="0"/>
-          <a:chExt cx="0" cy="0"/>
-        </a:xfrm>
-      </p:grpSpPr>
-      <p:sp>
-        <p:nvSpPr>
-          <p:cNvPr id="2" name="Slide Image Placeholder 1"/>
-          <p:cNvSpPr>
-            <a:spLocks noGrp="1" noRot="1" noChangeAspect="1"/>
-          </p:cNvSpPr>
-          <p:nvPr>
-            <p:ph type="sldImg" idx="2"/>
-          </p:nvPr>
-        </p:nvSpPr>
-        <p:spPr/>
-      </p:sp>
-      <p:sp>
-        <p:nvSpPr>
-          <p:cNvPr id="3" name="Notes Placeholder 2"/>
-          <p:cNvSpPr>
-            <a:spLocks noGrp="1"/>
-          </p:cNvSpPr>
-          <p:nvPr>
-            <p:ph type="body" sz="quarter" idx="3"/>
-          </p:nvPr>
-        </p:nvSpPr>
-        <p:spPr/>
-        <p:txBody>
-          <a:bodyPr/>
-          <a:lstStyle/>
-          <a:p>
-            <a:r>
-              <a:t>This is the Coefficients table from Worksheet 3, Exercise 3.1, Task 2 (model M1). The Unstandardized column is the line. The Standardized coefficient equals the correlation r in a one-predictor model. We leave SE, t and p for Week 5, but notice them now.</a:t>
             </a:r>
           </a:p>
         </p:txBody>
@@ -17416,7 +17558,7 @@
 </file>
 
 <file path=ppt/slides/slide10.xml><?xml version="1.0" encoding="utf-8"?>
-<p:sld xmlns:a="http://schemas.openxmlformats.org/drawingml/2006/main" xmlns:r="http://schemas.openxmlformats.org/officeDocument/2006/relationships" xmlns:p="http://schemas.openxmlformats.org/presentationml/2006/main">
+<p:sld xmlns:a="http://schemas.openxmlformats.org/drawingml/2006/main" xmlns:p="http://schemas.openxmlformats.org/presentationml/2006/main" xmlns:r="http://schemas.openxmlformats.org/officeDocument/2006/relationships">
   <p:cSld>
     <p:spTree>
       <p:nvGrpSpPr>
@@ -17424,14 +17566,7 @@
         <p:cNvGrpSpPr/>
         <p:nvPr/>
       </p:nvGrpSpPr>
-      <p:grpSpPr>
-        <a:xfrm>
-          <a:off x="0" y="0"/>
-          <a:ext cx="0" cy="0"/>
-          <a:chOff x="0" y="0"/>
-          <a:chExt cx="0" cy="0"/>
-        </a:xfrm>
-      </p:grpSpPr>
+      <p:grpSpPr/>
       <p:sp>
         <p:nvSpPr>
           <p:cNvPr id="2" name="Title 1"/>
@@ -17533,483 +17668,602 @@
           <a:p>
             <a:fld id="{9FAA51BB-2FC0-4DB8-B50E-F52D50E733B6}" type="slidenum">
               <a:rPr lang="en-GB" smtClean="0"/>
-              <a:t>10</a:t>
+              <a:t>28</a:t>
             </a:fld>
             <a:endParaRPr lang="en-GB"/>
           </a:p>
         </p:txBody>
       </p:sp>
+      <p:sp>
+        <p:nvSpPr>
+          <p:cNvPr id="6" name="TextBox 5"/>
+          <p:cNvSpPr txBox="1"/>
+          <p:nvPr/>
+        </p:nvSpPr>
+        <p:spPr>
+          <a:xfrm>
+            <a:off x="758952" y="1261872"/>
+            <a:ext cx="5303520" cy="274320"/>
+          </a:xfrm>
+          <a:prstGeom prst="rect">
+            <a:avLst/>
+          </a:prstGeom>
+          <a:noFill/>
+        </p:spPr>
+        <p:txBody>
+          <a:bodyPr wrap="square" lIns="0" rIns="0" tIns="0" bIns="0" anchor="t">
+            <a:spAutoFit/>
+          </a:bodyPr>
+          <a:lstStyle/>
+          <a:p>
+            <a:pPr algn="l"/>
+            <a:r>
+              <a:rPr sz="1400" b="1" i="0">
+                <a:solidFill>
+                  <a:srgbClr val="222222"/>
+                </a:solidFill>
+              </a:rPr>
+              <a:t>Model Summary – Trust</a:t>
+            </a:r>
+            <a:endParaRPr sz="1400"/>
+          </a:p>
+        </p:txBody>
+      </p:sp>
       <p:graphicFrame>
         <p:nvGraphicFramePr>
-          <p:cNvPr id="6" name="Table 5"/>
+          <p:cNvPr id="7" name="Table 6"/>
           <p:cNvGraphicFramePr>
             <a:graphicFrameLocks noGrp="1"/>
           </p:cNvGraphicFramePr>
           <p:nvPr/>
         </p:nvGraphicFramePr>
         <p:xfrm>
-          <a:off x="758952" y="1417320"/>
-          <a:ext cx="10607040" cy="1700784"/>
+          <a:off x="758952" y="1563624"/>
+          <a:ext cx="5303520" cy="877824"/>
         </p:xfrm>
         <a:graphic>
           <a:graphicData uri="http://schemas.openxmlformats.org/drawingml/2006/table">
             <a:tbl>
-              <a:tblPr firstRow="1">
-                <a:tableStyleId>{5C22544A-7EE6-4342-B048-85BDC9FD1C3A}</a:tableStyleId>
+              <a:tblPr>
+                <a:tableStyleId>{2D5ABB26-0587-4C30-8999-92F81FD0307C}</a:tableStyleId>
               </a:tblPr>
               <a:tblGrid>
-                <a:gridCol w="2651760">
-                  <a:extLst>
-                    <a:ext uri="{9D8B030D-6E8A-4147-A177-3AD203B41FA5}">
-                      <a16:colId xmlns:a16="http://schemas.microsoft.com/office/drawing/2014/main" val="20000"/>
-                    </a:ext>
-                  </a:extLst>
-                </a:gridCol>
-                <a:gridCol w="1828800">
-                  <a:extLst>
-                    <a:ext uri="{9D8B030D-6E8A-4147-A177-3AD203B41FA5}">
-                      <a16:colId xmlns:a16="http://schemas.microsoft.com/office/drawing/2014/main" val="20001"/>
-                    </a:ext>
-                  </a:extLst>
-                </a:gridCol>
-                <a:gridCol w="1737360">
-                  <a:extLst>
-                    <a:ext uri="{9D8B030D-6E8A-4147-A177-3AD203B41FA5}">
-                      <a16:colId xmlns:a16="http://schemas.microsoft.com/office/drawing/2014/main" val="20002"/>
-                    </a:ext>
-                  </a:extLst>
-                </a:gridCol>
-                <a:gridCol w="1645920">
-                  <a:extLst>
-                    <a:ext uri="{9D8B030D-6E8A-4147-A177-3AD203B41FA5}">
-                      <a16:colId xmlns:a16="http://schemas.microsoft.com/office/drawing/2014/main" val="20003"/>
-                    </a:ext>
-                  </a:extLst>
-                </a:gridCol>
-                <a:gridCol w="1280160">
-                  <a:extLst>
-                    <a:ext uri="{9D8B030D-6E8A-4147-A177-3AD203B41FA5}">
-                      <a16:colId xmlns:a16="http://schemas.microsoft.com/office/drawing/2014/main" val="20004"/>
-                    </a:ext>
-                  </a:extLst>
-                </a:gridCol>
-                <a:gridCol w="1463040">
-                  <a:extLst>
-                    <a:ext uri="{9D8B030D-6E8A-4147-A177-3AD203B41FA5}">
-                      <a16:colId xmlns:a16="http://schemas.microsoft.com/office/drawing/2014/main" val="20005"/>
-                    </a:ext>
-                  </a:extLst>
-                </a:gridCol>
+                <a:gridCol w="914400"/>
+                <a:gridCol w="1005840"/>
+                <a:gridCol w="1005840"/>
+                <a:gridCol w="1371600"/>
+                <a:gridCol w="1005840"/>
               </a:tblGrid>
-              <a:tr h="566928">
+              <a:tr h="292608">
                 <a:tc>
                   <a:txBody>
-                    <a:bodyPr/>
+                    <a:bodyPr wrap="square"/>
                     <a:lstStyle/>
                     <a:p>
                       <a:pPr algn="l"/>
                       <a:r>
-                        <a:rPr sz="1700" b="1">
+                        <a:rPr sz="1200" b="1" i="0">
                           <a:solidFill>
-                            <a:srgbClr val="FFFFFF"/>
+                            <a:srgbClr val="222222"/>
                           </a:solidFill>
                         </a:rPr>
-                        <a:t>Coefficients (M₁)</a:t>
+                        <a:t>Model</a:t>
                       </a:r>
+                      <a:endParaRPr sz="1200"/>
                     </a:p>
                   </a:txBody>
-                  <a:tcPr marT="27432" marB="27432" anchor="ctr">
-                    <a:solidFill>
-                      <a:srgbClr val="1F394D"/>
-                    </a:solidFill>
+                  <a:tcPr marL="73152" marR="73152" marT="27432" marB="27432" anchor="ctr">
+                    <a:lnL w="0">
+                      <a:noFill/>
+                    </a:lnL>
+                    <a:lnR w="0">
+                      <a:noFill/>
+                    </a:lnR>
+                    <a:lnT w="12700">
+                      <a:solidFill>
+                        <a:srgbClr val="222222"/>
+                      </a:solidFill>
+                    </a:lnT>
+                    <a:lnB w="9525">
+                      <a:solidFill>
+                        <a:srgbClr val="222222"/>
+                      </a:solidFill>
+                    </a:lnB>
+                    <a:noFill/>
                   </a:tcPr>
                 </a:tc>
                 <a:tc>
                   <a:txBody>
-                    <a:bodyPr/>
+                    <a:bodyPr wrap="square"/>
                     <a:lstStyle/>
                     <a:p>
                       <a:pPr algn="r"/>
                       <a:r>
-                        <a:rPr sz="1700" b="1">
+                        <a:rPr sz="1200" b="1" i="0">
                           <a:solidFill>
-                            <a:srgbClr val="FFFFFF"/>
+                            <a:srgbClr val="222222"/>
                           </a:solidFill>
                         </a:rPr>
-                        <a:t>Unstandardized</a:t>
+                        <a:t>R</a:t>
                       </a:r>
+                      <a:endParaRPr sz="1200"/>
                     </a:p>
                   </a:txBody>
-                  <a:tcPr marT="27432" marB="27432" anchor="ctr">
-                    <a:solidFill>
-                      <a:srgbClr val="1F394D"/>
-                    </a:solidFill>
+                  <a:tcPr marL="73152" marR="73152" marT="27432" marB="27432" anchor="ctr">
+                    <a:lnL w="0">
+                      <a:noFill/>
+                    </a:lnL>
+                    <a:lnR w="0">
+                      <a:noFill/>
+                    </a:lnR>
+                    <a:lnT w="12700">
+                      <a:solidFill>
+                        <a:srgbClr val="222222"/>
+                      </a:solidFill>
+                    </a:lnT>
+                    <a:lnB w="9525">
+                      <a:solidFill>
+                        <a:srgbClr val="222222"/>
+                      </a:solidFill>
+                    </a:lnB>
+                    <a:noFill/>
                   </a:tcPr>
                 </a:tc>
                 <a:tc>
                   <a:txBody>
-                    <a:bodyPr/>
+                    <a:bodyPr wrap="square"/>
                     <a:lstStyle/>
                     <a:p>
                       <a:pPr algn="r"/>
                       <a:r>
-                        <a:rPr sz="1700" b="1">
+                        <a:rPr sz="1200" b="1" i="0">
                           <a:solidFill>
-                            <a:srgbClr val="FFFFFF"/>
+                            <a:srgbClr val="222222"/>
                           </a:solidFill>
                         </a:rPr>
-                        <a:t>Standard error</a:t>
+                        <a:t>R²</a:t>
                       </a:r>
+                      <a:endParaRPr sz="1200"/>
                     </a:p>
                   </a:txBody>
-                  <a:tcPr marT="27432" marB="27432" anchor="ctr">
-                    <a:solidFill>
-                      <a:srgbClr val="1F394D"/>
-                    </a:solidFill>
+                  <a:tcPr marL="73152" marR="73152" marT="27432" marB="27432" anchor="ctr">
+                    <a:lnL w="0">
+                      <a:noFill/>
+                    </a:lnL>
+                    <a:lnR w="0">
+                      <a:noFill/>
+                    </a:lnR>
+                    <a:lnT w="12700">
+                      <a:solidFill>
+                        <a:srgbClr val="222222"/>
+                      </a:solidFill>
+                    </a:lnT>
+                    <a:lnB w="9525">
+                      <a:solidFill>
+                        <a:srgbClr val="222222"/>
+                      </a:solidFill>
+                    </a:lnB>
+                    <a:noFill/>
                   </a:tcPr>
                 </a:tc>
                 <a:tc>
                   <a:txBody>
-                    <a:bodyPr/>
+                    <a:bodyPr wrap="square"/>
                     <a:lstStyle/>
                     <a:p>
                       <a:pPr algn="r"/>
                       <a:r>
-                        <a:rPr sz="1700" b="1">
+                        <a:rPr sz="1200" b="1" i="0">
                           <a:solidFill>
-                            <a:srgbClr val="FFFFFF"/>
+                            <a:srgbClr val="222222"/>
                           </a:solidFill>
                         </a:rPr>
-                        <a:t>Standardized</a:t>
+                        <a:t>Adjusted R²</a:t>
                       </a:r>
+                      <a:endParaRPr sz="1200"/>
                     </a:p>
                   </a:txBody>
-                  <a:tcPr marT="27432" marB="27432" anchor="ctr">
-                    <a:solidFill>
-                      <a:srgbClr val="1F394D"/>
-                    </a:solidFill>
+                  <a:tcPr marL="73152" marR="73152" marT="27432" marB="27432" anchor="ctr">
+                    <a:lnL w="0">
+                      <a:noFill/>
+                    </a:lnL>
+                    <a:lnR w="0">
+                      <a:noFill/>
+                    </a:lnR>
+                    <a:lnT w="12700">
+                      <a:solidFill>
+                        <a:srgbClr val="222222"/>
+                      </a:solidFill>
+                    </a:lnT>
+                    <a:lnB w="9525">
+                      <a:solidFill>
+                        <a:srgbClr val="222222"/>
+                      </a:solidFill>
+                    </a:lnB>
+                    <a:noFill/>
                   </a:tcPr>
                 </a:tc>
                 <a:tc>
                   <a:txBody>
-                    <a:bodyPr/>
+                    <a:bodyPr wrap="square"/>
                     <a:lstStyle/>
                     <a:p>
                       <a:pPr algn="r"/>
                       <a:r>
-                        <a:rPr sz="1700" b="1">
+                        <a:rPr sz="1200" b="1" i="0">
                           <a:solidFill>
-                            <a:srgbClr val="FFFFFF"/>
+                            <a:srgbClr val="222222"/>
                           </a:solidFill>
                         </a:rPr>
-                        <a:t>t</a:t>
+                        <a:t>RMSE</a:t>
                       </a:r>
+                      <a:endParaRPr sz="1200"/>
                     </a:p>
                   </a:txBody>
-                  <a:tcPr marT="27432" marB="27432" anchor="ctr">
-                    <a:solidFill>
-                      <a:srgbClr val="1F394D"/>
-                    </a:solidFill>
+                  <a:tcPr marL="73152" marR="73152" marT="27432" marB="27432" anchor="ctr">
+                    <a:lnL w="0">
+                      <a:noFill/>
+                    </a:lnL>
+                    <a:lnR w="0">
+                      <a:noFill/>
+                    </a:lnR>
+                    <a:lnT w="12700">
+                      <a:solidFill>
+                        <a:srgbClr val="222222"/>
+                      </a:solidFill>
+                    </a:lnT>
+                    <a:lnB w="9525">
+                      <a:solidFill>
+                        <a:srgbClr val="222222"/>
+                      </a:solidFill>
+                    </a:lnB>
+                    <a:noFill/>
+                  </a:tcPr>
+                </a:tc>
+              </a:tr>
+              <a:tr h="292608">
+                <a:tc>
+                  <a:txBody>
+                    <a:bodyPr wrap="square"/>
+                    <a:lstStyle/>
+                    <a:p>
+                      <a:pPr algn="l"/>
+                      <a:r>
+                        <a:rPr sz="1200" b="0" i="0">
+                          <a:solidFill>
+                            <a:srgbClr val="222222"/>
+                          </a:solidFill>
+                        </a:rPr>
+                        <a:t>M₀</a:t>
+                      </a:r>
+                      <a:endParaRPr sz="1200"/>
+                    </a:p>
+                  </a:txBody>
+                  <a:tcPr marL="73152" marR="73152" marT="27432" marB="27432" anchor="ctr">
+                    <a:lnL w="0">
+                      <a:noFill/>
+                    </a:lnL>
+                    <a:lnR w="0">
+                      <a:noFill/>
+                    </a:lnR>
+                    <a:lnT w="0">
+                      <a:noFill/>
+                    </a:lnT>
+                    <a:lnB w="0">
+                      <a:noFill/>
+                    </a:lnB>
+                    <a:noFill/>
                   </a:tcPr>
                 </a:tc>
                 <a:tc>
                   <a:txBody>
-                    <a:bodyPr/>
+                    <a:bodyPr wrap="square"/>
                     <a:lstStyle/>
                     <a:p>
                       <a:pPr algn="r"/>
                       <a:r>
-                        <a:rPr sz="1700" b="1">
+                        <a:rPr sz="1200" b="0" i="0">
                           <a:solidFill>
-                            <a:srgbClr val="FFFFFF"/>
+                            <a:srgbClr val="222222"/>
                           </a:solidFill>
                         </a:rPr>
-                        <a:t>p</a:t>
+                        <a:t>0.000</a:t>
                       </a:r>
+                      <a:endParaRPr sz="1200"/>
                     </a:p>
                   </a:txBody>
-                  <a:tcPr marT="27432" marB="27432" anchor="ctr">
-                    <a:solidFill>
-                      <a:srgbClr val="1F394D"/>
-                    </a:solidFill>
+                  <a:tcPr marL="73152" marR="73152" marT="27432" marB="27432" anchor="ctr">
+                    <a:lnL w="0">
+                      <a:noFill/>
+                    </a:lnL>
+                    <a:lnR w="0">
+                      <a:noFill/>
+                    </a:lnR>
+                    <a:lnT w="0">
+                      <a:noFill/>
+                    </a:lnT>
+                    <a:lnB w="0">
+                      <a:noFill/>
+                    </a:lnB>
+                    <a:noFill/>
                   </a:tcPr>
                 </a:tc>
-                <a:extLst>
-                  <a:ext uri="{0D108BD9-81ED-4DB2-BD59-A6C34878D82A}">
-                    <a16:rowId xmlns:a16="http://schemas.microsoft.com/office/drawing/2014/main" val="10000"/>
-                  </a:ext>
-                </a:extLst>
-              </a:tr>
-              <a:tr h="566928">
                 <a:tc>
                   <a:txBody>
-                    <a:bodyPr/>
+                    <a:bodyPr wrap="square"/>
+                    <a:lstStyle/>
+                    <a:p>
+                      <a:pPr algn="r"/>
+                      <a:r>
+                        <a:rPr sz="1200" b="0" i="0">
+                          <a:solidFill>
+                            <a:srgbClr val="222222"/>
+                          </a:solidFill>
+                        </a:rPr>
+                        <a:t>0.000</a:t>
+                      </a:r>
+                      <a:endParaRPr sz="1200"/>
+                    </a:p>
+                  </a:txBody>
+                  <a:tcPr marL="73152" marR="73152" marT="27432" marB="27432" anchor="ctr">
+                    <a:lnL w="0">
+                      <a:noFill/>
+                    </a:lnL>
+                    <a:lnR w="0">
+                      <a:noFill/>
+                    </a:lnR>
+                    <a:lnT w="0">
+                      <a:noFill/>
+                    </a:lnT>
+                    <a:lnB w="0">
+                      <a:noFill/>
+                    </a:lnB>
+                    <a:noFill/>
+                  </a:tcPr>
+                </a:tc>
+                <a:tc>
+                  <a:txBody>
+                    <a:bodyPr wrap="square"/>
+                    <a:lstStyle/>
+                    <a:p>
+                      <a:pPr algn="r"/>
+                      <a:r>
+                        <a:rPr sz="1200" b="0" i="0">
+                          <a:solidFill>
+                            <a:srgbClr val="222222"/>
+                          </a:solidFill>
+                        </a:rPr>
+                        <a:t>0.000</a:t>
+                      </a:r>
+                      <a:endParaRPr sz="1200"/>
+                    </a:p>
+                  </a:txBody>
+                  <a:tcPr marL="73152" marR="73152" marT="27432" marB="27432" anchor="ctr">
+                    <a:lnL w="0">
+                      <a:noFill/>
+                    </a:lnL>
+                    <a:lnR w="0">
+                      <a:noFill/>
+                    </a:lnR>
+                    <a:lnT w="0">
+                      <a:noFill/>
+                    </a:lnT>
+                    <a:lnB w="0">
+                      <a:noFill/>
+                    </a:lnB>
+                    <a:noFill/>
+                  </a:tcPr>
+                </a:tc>
+                <a:tc>
+                  <a:txBody>
+                    <a:bodyPr wrap="square"/>
+                    <a:lstStyle/>
+                    <a:p>
+                      <a:pPr algn="r"/>
+                      <a:r>
+                        <a:rPr sz="1200" b="0" i="0">
+                          <a:solidFill>
+                            <a:srgbClr val="222222"/>
+                          </a:solidFill>
+                        </a:rPr>
+                        <a:t>15.763</a:t>
+                      </a:r>
+                      <a:endParaRPr sz="1200"/>
+                    </a:p>
+                  </a:txBody>
+                  <a:tcPr marL="73152" marR="73152" marT="27432" marB="27432" anchor="ctr">
+                    <a:lnL w="0">
+                      <a:noFill/>
+                    </a:lnL>
+                    <a:lnR w="0">
+                      <a:noFill/>
+                    </a:lnR>
+                    <a:lnT w="0">
+                      <a:noFill/>
+                    </a:lnT>
+                    <a:lnB w="0">
+                      <a:noFill/>
+                    </a:lnB>
+                    <a:noFill/>
+                  </a:tcPr>
+                </a:tc>
+              </a:tr>
+              <a:tr h="292608">
+                <a:tc>
+                  <a:txBody>
+                    <a:bodyPr wrap="square"/>
                     <a:lstStyle/>
                     <a:p>
                       <a:pPr algn="l"/>
                       <a:r>
-                        <a:rPr sz="1700" b="1">
+                        <a:rPr sz="1200" b="0" i="0">
                           <a:solidFill>
-                            <a:srgbClr val="1F2A33"/>
+                            <a:srgbClr val="222222"/>
                           </a:solidFill>
                         </a:rPr>
-                        <a:t>(Intercept)</a:t>
+                        <a:t>M₁</a:t>
                       </a:r>
+                      <a:endParaRPr sz="1200"/>
                     </a:p>
                   </a:txBody>
-                  <a:tcPr marT="27432" marB="27432" anchor="ctr">
-                    <a:solidFill>
-                      <a:srgbClr val="FFFFFF"/>
-                    </a:solidFill>
+                  <a:tcPr marL="73152" marR="73152" marT="27432" marB="27432" anchor="ctr">
+                    <a:lnL w="0">
+                      <a:noFill/>
+                    </a:lnL>
+                    <a:lnR w="0">
+                      <a:noFill/>
+                    </a:lnR>
+                    <a:lnT w="0">
+                      <a:noFill/>
+                    </a:lnT>
+                    <a:lnB w="12700">
+                      <a:solidFill>
+                        <a:srgbClr val="222222"/>
+                      </a:solidFill>
+                    </a:lnB>
+                    <a:noFill/>
                   </a:tcPr>
                 </a:tc>
                 <a:tc>
                   <a:txBody>
-                    <a:bodyPr/>
+                    <a:bodyPr wrap="square"/>
                     <a:lstStyle/>
                     <a:p>
                       <a:pPr algn="r"/>
                       <a:r>
-                        <a:rPr sz="1700" b="0">
+                        <a:rPr sz="1200" b="0" i="0">
                           <a:solidFill>
-                            <a:srgbClr val="1F2A33"/>
+                            <a:srgbClr val="222222"/>
                           </a:solidFill>
                         </a:rPr>
-                        <a:t>77.062</a:t>
+                        <a:t>0.664</a:t>
                       </a:r>
+                      <a:endParaRPr sz="1200"/>
                     </a:p>
                   </a:txBody>
-                  <a:tcPr marT="27432" marB="27432" anchor="ctr">
-                    <a:solidFill>
-                      <a:srgbClr val="FFFFFF"/>
-                    </a:solidFill>
+                  <a:tcPr marL="73152" marR="73152" marT="27432" marB="27432" anchor="ctr">
+                    <a:lnL w="0">
+                      <a:noFill/>
+                    </a:lnL>
+                    <a:lnR w="0">
+                      <a:noFill/>
+                    </a:lnR>
+                    <a:lnT w="0">
+                      <a:noFill/>
+                    </a:lnT>
+                    <a:lnB w="12700">
+                      <a:solidFill>
+                        <a:srgbClr val="222222"/>
+                      </a:solidFill>
+                    </a:lnB>
+                    <a:noFill/>
                   </a:tcPr>
                 </a:tc>
                 <a:tc>
                   <a:txBody>
-                    <a:bodyPr/>
+                    <a:bodyPr wrap="square"/>
                     <a:lstStyle/>
                     <a:p>
                       <a:pPr algn="r"/>
                       <a:r>
-                        <a:rPr sz="1700" b="0">
+                        <a:rPr sz="1200" b="0" i="0">
                           <a:solidFill>
-                            <a:srgbClr val="1F2A33"/>
+                            <a:srgbClr val="222222"/>
                           </a:solidFill>
                         </a:rPr>
-                        <a:t>9.721</a:t>
+                        <a:t>0.441</a:t>
                       </a:r>
+                      <a:endParaRPr sz="1200"/>
                     </a:p>
                   </a:txBody>
-                  <a:tcPr marT="27432" marB="27432" anchor="ctr">
-                    <a:solidFill>
-                      <a:srgbClr val="FFFFFF"/>
-                    </a:solidFill>
+                  <a:tcPr marL="73152" marR="73152" marT="27432" marB="27432" anchor="ctr">
+                    <a:lnL w="0">
+                      <a:noFill/>
+                    </a:lnL>
+                    <a:lnR w="0">
+                      <a:noFill/>
+                    </a:lnR>
+                    <a:lnT w="0">
+                      <a:noFill/>
+                    </a:lnT>
+                    <a:lnB w="12700">
+                      <a:solidFill>
+                        <a:srgbClr val="222222"/>
+                      </a:solidFill>
+                    </a:lnB>
+                    <a:noFill/>
                   </a:tcPr>
                 </a:tc>
                 <a:tc>
                   <a:txBody>
-                    <a:bodyPr/>
+                    <a:bodyPr wrap="square"/>
                     <a:lstStyle/>
                     <a:p>
                       <a:pPr algn="r"/>
-                      <a:endParaRPr/>
+                      <a:r>
+                        <a:rPr sz="1200" b="0" i="0">
+                          <a:solidFill>
+                            <a:srgbClr val="222222"/>
+                          </a:solidFill>
+                        </a:rPr>
+                        <a:t>0.415</a:t>
+                      </a:r>
+                      <a:endParaRPr sz="1200"/>
                     </a:p>
                   </a:txBody>
-                  <a:tcPr marT="27432" marB="27432" anchor="ctr">
-                    <a:solidFill>
-                      <a:srgbClr val="FFFFFF"/>
-                    </a:solidFill>
+                  <a:tcPr marL="73152" marR="73152" marT="27432" marB="27432" anchor="ctr">
+                    <a:lnL w="0">
+                      <a:noFill/>
+                    </a:lnL>
+                    <a:lnR w="0">
+                      <a:noFill/>
+                    </a:lnR>
+                    <a:lnT w="0">
+                      <a:noFill/>
+                    </a:lnT>
+                    <a:lnB w="12700">
+                      <a:solidFill>
+                        <a:srgbClr val="222222"/>
+                      </a:solidFill>
+                    </a:lnB>
+                    <a:noFill/>
                   </a:tcPr>
                 </a:tc>
                 <a:tc>
                   <a:txBody>
-                    <a:bodyPr/>
+                    <a:bodyPr wrap="square"/>
                     <a:lstStyle/>
                     <a:p>
                       <a:pPr algn="r"/>
                       <a:r>
-                        <a:rPr sz="1700" b="0">
+                        <a:rPr sz="1200" b="0" i="0">
                           <a:solidFill>
-                            <a:srgbClr val="1F2A33"/>
+                            <a:srgbClr val="222222"/>
                           </a:solidFill>
                         </a:rPr>
-                        <a:t>7.93</a:t>
+                        <a:t>12.061</a:t>
                       </a:r>
+                      <a:endParaRPr sz="1200"/>
                     </a:p>
                   </a:txBody>
-                  <a:tcPr marT="27432" marB="27432" anchor="ctr">
-                    <a:solidFill>
-                      <a:srgbClr val="FFFFFF"/>
-                    </a:solidFill>
+                  <a:tcPr marL="73152" marR="73152" marT="27432" marB="27432" anchor="ctr">
+                    <a:lnL w="0">
+                      <a:noFill/>
+                    </a:lnL>
+                    <a:lnR w="0">
+                      <a:noFill/>
+                    </a:lnR>
+                    <a:lnT w="0">
+                      <a:noFill/>
+                    </a:lnT>
+                    <a:lnB w="12700">
+                      <a:solidFill>
+                        <a:srgbClr val="222222"/>
+                      </a:solidFill>
+                    </a:lnB>
+                    <a:noFill/>
                   </a:tcPr>
                 </a:tc>
-                <a:tc>
-                  <a:txBody>
-                    <a:bodyPr/>
-                    <a:lstStyle/>
-                    <a:p>
-                      <a:pPr algn="r"/>
-                      <a:r>
-                        <a:rPr sz="1700" b="0">
-                          <a:solidFill>
-                            <a:srgbClr val="1F2A33"/>
-                          </a:solidFill>
-                        </a:rPr>
-                        <a:t>&lt; .001</a:t>
-                      </a:r>
-                    </a:p>
-                  </a:txBody>
-                  <a:tcPr marT="27432" marB="27432" anchor="ctr">
-                    <a:solidFill>
-                      <a:srgbClr val="FFFFFF"/>
-                    </a:solidFill>
-                  </a:tcPr>
-                </a:tc>
-                <a:extLst>
-                  <a:ext uri="{0D108BD9-81ED-4DB2-BD59-A6C34878D82A}">
-                    <a16:rowId xmlns:a16="http://schemas.microsoft.com/office/drawing/2014/main" val="10001"/>
-                  </a:ext>
-                </a:extLst>
-              </a:tr>
-              <a:tr h="566928">
-                <a:tc>
-                  <a:txBody>
-                    <a:bodyPr/>
-                    <a:lstStyle/>
-                    <a:p>
-                      <a:pPr algn="l"/>
-                      <a:r>
-                        <a:rPr sz="1700" b="1">
-                          <a:solidFill>
-                            <a:srgbClr val="1F2A33"/>
-                          </a:solidFill>
-                        </a:rPr>
-                        <a:t>Income inequality</a:t>
-                      </a:r>
-                    </a:p>
-                  </a:txBody>
-                  <a:tcPr marT="27432" marB="27432" anchor="ctr">
-                    <a:solidFill>
-                      <a:srgbClr val="F6E7B8"/>
-                    </a:solidFill>
-                  </a:tcPr>
-                </a:tc>
-                <a:tc>
-                  <a:txBody>
-                    <a:bodyPr/>
-                    <a:lstStyle/>
-                    <a:p>
-                      <a:pPr algn="r"/>
-                      <a:r>
-                        <a:rPr sz="1700" b="0">
-                          <a:solidFill>
-                            <a:srgbClr val="1F2A33"/>
-                          </a:solidFill>
-                        </a:rPr>
-                        <a:t>−6.535</a:t>
-                      </a:r>
-                    </a:p>
-                  </a:txBody>
-                  <a:tcPr marT="27432" marB="27432" anchor="ctr">
-                    <a:solidFill>
-                      <a:srgbClr val="F6E7B8"/>
-                    </a:solidFill>
-                  </a:tcPr>
-                </a:tc>
-                <a:tc>
-                  <a:txBody>
-                    <a:bodyPr/>
-                    <a:lstStyle/>
-                    <a:p>
-                      <a:pPr algn="r"/>
-                      <a:r>
-                        <a:rPr sz="1700" b="0">
-                          <a:solidFill>
-                            <a:srgbClr val="1F2A33"/>
-                          </a:solidFill>
-                        </a:rPr>
-                        <a:t>1.605</a:t>
-                      </a:r>
-                    </a:p>
-                  </a:txBody>
-                  <a:tcPr marT="27432" marB="27432" anchor="ctr">
-                    <a:solidFill>
-                      <a:srgbClr val="F6E7B8"/>
-                    </a:solidFill>
-                  </a:tcPr>
-                </a:tc>
-                <a:tc>
-                  <a:txBody>
-                    <a:bodyPr/>
-                    <a:lstStyle/>
-                    <a:p>
-                      <a:pPr algn="r"/>
-                      <a:r>
-                        <a:rPr sz="1700" b="0">
-                          <a:solidFill>
-                            <a:srgbClr val="1F2A33"/>
-                          </a:solidFill>
-                        </a:rPr>
-                        <a:t>−0.664</a:t>
-                      </a:r>
-                    </a:p>
-                  </a:txBody>
-                  <a:tcPr marT="27432" marB="27432" anchor="ctr">
-                    <a:solidFill>
-                      <a:srgbClr val="F6E7B8"/>
-                    </a:solidFill>
-                  </a:tcPr>
-                </a:tc>
-                <a:tc>
-                  <a:txBody>
-                    <a:bodyPr/>
-                    <a:lstStyle/>
-                    <a:p>
-                      <a:pPr algn="r"/>
-                      <a:r>
-                        <a:rPr sz="1700" b="0">
-                          <a:solidFill>
-                            <a:srgbClr val="1F2A33"/>
-                          </a:solidFill>
-                        </a:rPr>
-                        <a:t>−4.07</a:t>
-                      </a:r>
-                    </a:p>
-                  </a:txBody>
-                  <a:tcPr marT="27432" marB="27432" anchor="ctr">
-                    <a:solidFill>
-                      <a:srgbClr val="F6E7B8"/>
-                    </a:solidFill>
-                  </a:tcPr>
-                </a:tc>
-                <a:tc>
-                  <a:txBody>
-                    <a:bodyPr/>
-                    <a:lstStyle/>
-                    <a:p>
-                      <a:pPr algn="r"/>
-                      <a:r>
-                        <a:rPr sz="1700" b="0">
-                          <a:solidFill>
-                            <a:srgbClr val="1F2A33"/>
-                          </a:solidFill>
-                        </a:rPr>
-                        <a:t>&lt; .001</a:t>
-                      </a:r>
-                    </a:p>
-                  </a:txBody>
-                  <a:tcPr marT="27432" marB="27432" anchor="ctr">
-                    <a:solidFill>
-                      <a:srgbClr val="F6E7B8"/>
-                    </a:solidFill>
-                  </a:tcPr>
-                </a:tc>
-                <a:extLst>
-                  <a:ext uri="{0D108BD9-81ED-4DB2-BD59-A6C34878D82A}">
-                    <a16:rowId xmlns:a16="http://schemas.microsoft.com/office/drawing/2014/main" val="10002"/>
-                  </a:ext>
-                </a:extLst>
               </a:tr>
             </a:tbl>
           </a:graphicData>
@@ -18017,14 +18271,14 @@
       </p:graphicFrame>
       <p:sp>
         <p:nvSpPr>
-          <p:cNvPr id="7" name="TextBox 6"/>
+          <p:cNvPr id="8" name="TextBox 7"/>
           <p:cNvSpPr txBox="1"/>
           <p:nvPr/>
         </p:nvSpPr>
         <p:spPr>
           <a:xfrm>
-            <a:off x="758952" y="3200400"/>
-            <a:ext cx="10607040" cy="365760"/>
+            <a:off x="758952" y="2478024"/>
+            <a:ext cx="5303520" cy="237744"/>
           </a:xfrm>
           <a:prstGeom prst="rect">
             <a:avLst/>
@@ -18032,148 +18286,1348 @@
           <a:noFill/>
         </p:spPr>
         <p:txBody>
-          <a:bodyPr wrap="square" lIns="0" tIns="0" rIns="0" bIns="0" anchor="t">
+          <a:bodyPr wrap="square" lIns="0" rIns="0" tIns="0" bIns="0" anchor="t">
             <a:spAutoFit/>
           </a:bodyPr>
           <a:lstStyle/>
           <a:p>
             <a:pPr algn="l"/>
             <a:r>
-              <a:rPr sz="1600" b="0" i="0">
+              <a:rPr sz="1100" b="0" i="1">
                 <a:solidFill>
-                  <a:srgbClr val="55606B"/>
+                  <a:srgbClr val="222222"/>
                 </a:solidFill>
               </a:rPr>
-              <a:t>Model summary:  R = 0.664   R² = 0.441   n = 23</a:t>
-            </a:r>
-          </a:p>
-        </p:txBody>
-      </p:sp>
-      <p:sp>
-        <p:nvSpPr>
-          <p:cNvPr id="8" name="Rounded Rectangle 7"/>
+              <a:t>Note. </a:t>
+            </a:r>
+            <a:r>
+              <a:rPr sz="1100" b="0" i="0">
+                <a:solidFill>
+                  <a:srgbClr val="222222"/>
+                </a:solidFill>
+              </a:rPr>
+              <a:t>M₁ includes Income inequality</a:t>
+            </a:r>
+            <a:endParaRPr sz="1100"/>
+          </a:p>
+        </p:txBody>
+      </p:sp>
+      <p:sp>
+        <p:nvSpPr>
+          <p:cNvPr id="9" name="TextBox 8"/>
+          <p:cNvSpPr txBox="1"/>
+          <p:nvPr/>
+        </p:nvSpPr>
+        <p:spPr>
+          <a:xfrm>
+            <a:off x="758952" y="2852927"/>
+            <a:ext cx="8686800" cy="274320"/>
+          </a:xfrm>
+          <a:prstGeom prst="rect">
+            <a:avLst/>
+          </a:prstGeom>
+          <a:noFill/>
+        </p:spPr>
+        <p:txBody>
+          <a:bodyPr wrap="square" lIns="0" rIns="0" tIns="0" bIns="0" anchor="t">
+            <a:spAutoFit/>
+          </a:bodyPr>
+          <a:lstStyle/>
+          <a:p>
+            <a:pPr algn="l"/>
+            <a:r>
+              <a:rPr sz="1400" b="1" i="0">
+                <a:solidFill>
+                  <a:srgbClr val="222222"/>
+                </a:solidFill>
+              </a:rPr>
+              <a:t>Coefficients</a:t>
+            </a:r>
+            <a:endParaRPr sz="1400"/>
+          </a:p>
+        </p:txBody>
+      </p:sp>
+      <p:graphicFrame>
+        <p:nvGraphicFramePr>
+          <p:cNvPr id="10" name="Table 9"/>
+          <p:cNvGraphicFramePr>
+            <a:graphicFrameLocks noGrp="1"/>
+          </p:cNvGraphicFramePr>
+          <p:nvPr/>
+        </p:nvGraphicFramePr>
+        <p:xfrm>
+          <a:off x="758952" y="3154679"/>
+          <a:ext cx="8686800" cy="1170432"/>
+        </p:xfrm>
+        <a:graphic>
+          <a:graphicData uri="http://schemas.openxmlformats.org/drawingml/2006/table">
+            <a:tbl>
+              <a:tblPr>
+                <a:tableStyleId>{2D5ABB26-0587-4C30-8999-92F81FD0307C}</a:tableStyleId>
+              </a:tblPr>
+              <a:tblGrid>
+                <a:gridCol w="822960"/>
+                <a:gridCol w="1828800"/>
+                <a:gridCol w="1417320"/>
+                <a:gridCol w="1463040"/>
+                <a:gridCol w="1371600"/>
+                <a:gridCol w="914400"/>
+                <a:gridCol w="868680"/>
+              </a:tblGrid>
+              <a:tr h="292608">
+                <a:tc>
+                  <a:txBody>
+                    <a:bodyPr wrap="square"/>
+                    <a:lstStyle/>
+                    <a:p>
+                      <a:pPr algn="l"/>
+                      <a:r>
+                        <a:rPr sz="1200" b="1" i="0">
+                          <a:solidFill>
+                            <a:srgbClr val="222222"/>
+                          </a:solidFill>
+                        </a:rPr>
+                        <a:t>Model</a:t>
+                      </a:r>
+                      <a:endParaRPr sz="1200"/>
+                    </a:p>
+                  </a:txBody>
+                  <a:tcPr marL="73152" marR="73152" marT="27432" marB="27432" anchor="ctr">
+                    <a:lnL w="0">
+                      <a:noFill/>
+                    </a:lnL>
+                    <a:lnR w="0">
+                      <a:noFill/>
+                    </a:lnR>
+                    <a:lnT w="12700">
+                      <a:solidFill>
+                        <a:srgbClr val="222222"/>
+                      </a:solidFill>
+                    </a:lnT>
+                    <a:lnB w="9525">
+                      <a:solidFill>
+                        <a:srgbClr val="222222"/>
+                      </a:solidFill>
+                    </a:lnB>
+                    <a:noFill/>
+                  </a:tcPr>
+                </a:tc>
+                <a:tc>
+                  <a:txBody>
+                    <a:bodyPr wrap="square"/>
+                    <a:lstStyle/>
+                    <a:p>
+                      <a:pPr algn="r"/>
+                      <a:r>
+                        <a:rPr sz="1200" b="1" i="0">
+                          <a:solidFill>
+                            <a:srgbClr val="222222"/>
+                          </a:solidFill>
+                        </a:rPr>
+                        <a:t/>
+                      </a:r>
+                      <a:endParaRPr sz="1200"/>
+                    </a:p>
+                  </a:txBody>
+                  <a:tcPr marL="73152" marR="73152" marT="27432" marB="27432" anchor="ctr">
+                    <a:lnL w="0">
+                      <a:noFill/>
+                    </a:lnL>
+                    <a:lnR w="0">
+                      <a:noFill/>
+                    </a:lnR>
+                    <a:lnT w="12700">
+                      <a:solidFill>
+                        <a:srgbClr val="222222"/>
+                      </a:solidFill>
+                    </a:lnT>
+                    <a:lnB w="9525">
+                      <a:solidFill>
+                        <a:srgbClr val="222222"/>
+                      </a:solidFill>
+                    </a:lnB>
+                    <a:noFill/>
+                  </a:tcPr>
+                </a:tc>
+                <a:tc>
+                  <a:txBody>
+                    <a:bodyPr wrap="square"/>
+                    <a:lstStyle/>
+                    <a:p>
+                      <a:pPr algn="r"/>
+                      <a:r>
+                        <a:rPr sz="1200" b="1" i="0">
+                          <a:solidFill>
+                            <a:srgbClr val="222222"/>
+                          </a:solidFill>
+                        </a:rPr>
+                        <a:t>Unstandardized</a:t>
+                      </a:r>
+                      <a:endParaRPr sz="1200"/>
+                    </a:p>
+                  </a:txBody>
+                  <a:tcPr marL="73152" marR="73152" marT="27432" marB="27432" anchor="ctr">
+                    <a:lnL w="0">
+                      <a:noFill/>
+                    </a:lnL>
+                    <a:lnR w="0">
+                      <a:noFill/>
+                    </a:lnR>
+                    <a:lnT w="12700">
+                      <a:solidFill>
+                        <a:srgbClr val="222222"/>
+                      </a:solidFill>
+                    </a:lnT>
+                    <a:lnB w="9525">
+                      <a:solidFill>
+                        <a:srgbClr val="222222"/>
+                      </a:solidFill>
+                    </a:lnB>
+                    <a:noFill/>
+                  </a:tcPr>
+                </a:tc>
+                <a:tc>
+                  <a:txBody>
+                    <a:bodyPr wrap="square"/>
+                    <a:lstStyle/>
+                    <a:p>
+                      <a:pPr algn="r"/>
+                      <a:r>
+                        <a:rPr sz="1200" b="1" i="0">
+                          <a:solidFill>
+                            <a:srgbClr val="222222"/>
+                          </a:solidFill>
+                        </a:rPr>
+                        <a:t>Standard Error</a:t>
+                      </a:r>
+                      <a:endParaRPr sz="1200"/>
+                    </a:p>
+                  </a:txBody>
+                  <a:tcPr marL="73152" marR="73152" marT="27432" marB="27432" anchor="ctr">
+                    <a:lnL w="0">
+                      <a:noFill/>
+                    </a:lnL>
+                    <a:lnR w="0">
+                      <a:noFill/>
+                    </a:lnR>
+                    <a:lnT w="12700">
+                      <a:solidFill>
+                        <a:srgbClr val="222222"/>
+                      </a:solidFill>
+                    </a:lnT>
+                    <a:lnB w="9525">
+                      <a:solidFill>
+                        <a:srgbClr val="222222"/>
+                      </a:solidFill>
+                    </a:lnB>
+                    <a:noFill/>
+                  </a:tcPr>
+                </a:tc>
+                <a:tc>
+                  <a:txBody>
+                    <a:bodyPr wrap="square"/>
+                    <a:lstStyle/>
+                    <a:p>
+                      <a:pPr algn="r"/>
+                      <a:r>
+                        <a:rPr sz="1200" b="1" i="0">
+                          <a:solidFill>
+                            <a:srgbClr val="222222"/>
+                          </a:solidFill>
+                        </a:rPr>
+                        <a:t>Standardized</a:t>
+                      </a:r>
+                      <a:endParaRPr sz="1200"/>
+                    </a:p>
+                  </a:txBody>
+                  <a:tcPr marL="73152" marR="73152" marT="27432" marB="27432" anchor="ctr">
+                    <a:lnL w="0">
+                      <a:noFill/>
+                    </a:lnL>
+                    <a:lnR w="0">
+                      <a:noFill/>
+                    </a:lnR>
+                    <a:lnT w="12700">
+                      <a:solidFill>
+                        <a:srgbClr val="222222"/>
+                      </a:solidFill>
+                    </a:lnT>
+                    <a:lnB w="9525">
+                      <a:solidFill>
+                        <a:srgbClr val="222222"/>
+                      </a:solidFill>
+                    </a:lnB>
+                    <a:noFill/>
+                  </a:tcPr>
+                </a:tc>
+                <a:tc>
+                  <a:txBody>
+                    <a:bodyPr wrap="square"/>
+                    <a:lstStyle/>
+                    <a:p>
+                      <a:pPr algn="r"/>
+                      <a:r>
+                        <a:rPr sz="1200" b="1" i="0">
+                          <a:solidFill>
+                            <a:srgbClr val="222222"/>
+                          </a:solidFill>
+                        </a:rPr>
+                        <a:t>t</a:t>
+                      </a:r>
+                      <a:endParaRPr sz="1200"/>
+                    </a:p>
+                  </a:txBody>
+                  <a:tcPr marL="73152" marR="73152" marT="27432" marB="27432" anchor="ctr">
+                    <a:lnL w="0">
+                      <a:noFill/>
+                    </a:lnL>
+                    <a:lnR w="0">
+                      <a:noFill/>
+                    </a:lnR>
+                    <a:lnT w="12700">
+                      <a:solidFill>
+                        <a:srgbClr val="222222"/>
+                      </a:solidFill>
+                    </a:lnT>
+                    <a:lnB w="9525">
+                      <a:solidFill>
+                        <a:srgbClr val="222222"/>
+                      </a:solidFill>
+                    </a:lnB>
+                    <a:noFill/>
+                  </a:tcPr>
+                </a:tc>
+                <a:tc>
+                  <a:txBody>
+                    <a:bodyPr wrap="square"/>
+                    <a:lstStyle/>
+                    <a:p>
+                      <a:pPr algn="r"/>
+                      <a:r>
+                        <a:rPr sz="1200" b="1" i="0">
+                          <a:solidFill>
+                            <a:srgbClr val="222222"/>
+                          </a:solidFill>
+                        </a:rPr>
+                        <a:t>p</a:t>
+                      </a:r>
+                      <a:endParaRPr sz="1200"/>
+                    </a:p>
+                  </a:txBody>
+                  <a:tcPr marL="73152" marR="73152" marT="27432" marB="27432" anchor="ctr">
+                    <a:lnL w="0">
+                      <a:noFill/>
+                    </a:lnL>
+                    <a:lnR w="0">
+                      <a:noFill/>
+                    </a:lnR>
+                    <a:lnT w="12700">
+                      <a:solidFill>
+                        <a:srgbClr val="222222"/>
+                      </a:solidFill>
+                    </a:lnT>
+                    <a:lnB w="9525">
+                      <a:solidFill>
+                        <a:srgbClr val="222222"/>
+                      </a:solidFill>
+                    </a:lnB>
+                    <a:noFill/>
+                  </a:tcPr>
+                </a:tc>
+              </a:tr>
+              <a:tr h="292608">
+                <a:tc>
+                  <a:txBody>
+                    <a:bodyPr wrap="square"/>
+                    <a:lstStyle/>
+                    <a:p>
+                      <a:pPr algn="l"/>
+                      <a:r>
+                        <a:rPr sz="1200" b="0" i="0">
+                          <a:solidFill>
+                            <a:srgbClr val="222222"/>
+                          </a:solidFill>
+                        </a:rPr>
+                        <a:t>M₀</a:t>
+                      </a:r>
+                      <a:endParaRPr sz="1200"/>
+                    </a:p>
+                  </a:txBody>
+                  <a:tcPr marL="73152" marR="73152" marT="27432" marB="27432" anchor="ctr">
+                    <a:lnL w="0">
+                      <a:noFill/>
+                    </a:lnL>
+                    <a:lnR w="0">
+                      <a:noFill/>
+                    </a:lnR>
+                    <a:lnT w="0">
+                      <a:noFill/>
+                    </a:lnT>
+                    <a:lnB w="0">
+                      <a:noFill/>
+                    </a:lnB>
+                    <a:noFill/>
+                  </a:tcPr>
+                </a:tc>
+                <a:tc>
+                  <a:txBody>
+                    <a:bodyPr wrap="square"/>
+                    <a:lstStyle/>
+                    <a:p>
+                      <a:pPr algn="r"/>
+                      <a:r>
+                        <a:rPr sz="1200" b="0" i="0">
+                          <a:solidFill>
+                            <a:srgbClr val="222222"/>
+                          </a:solidFill>
+                        </a:rPr>
+                        <a:t>(Intercept)</a:t>
+                      </a:r>
+                      <a:endParaRPr sz="1200"/>
+                    </a:p>
+                  </a:txBody>
+                  <a:tcPr marL="73152" marR="73152" marT="27432" marB="27432" anchor="ctr">
+                    <a:lnL w="0">
+                      <a:noFill/>
+                    </a:lnL>
+                    <a:lnR w="0">
+                      <a:noFill/>
+                    </a:lnR>
+                    <a:lnT w="0">
+                      <a:noFill/>
+                    </a:lnT>
+                    <a:lnB w="0">
+                      <a:noFill/>
+                    </a:lnB>
+                    <a:noFill/>
+                  </a:tcPr>
+                </a:tc>
+                <a:tc>
+                  <a:txBody>
+                    <a:bodyPr wrap="square"/>
+                    <a:lstStyle/>
+                    <a:p>
+                      <a:pPr algn="r"/>
+                      <a:r>
+                        <a:rPr sz="1200" b="0" i="0">
+                          <a:solidFill>
+                            <a:srgbClr val="222222"/>
+                          </a:solidFill>
+                        </a:rPr>
+                        <a:t>38.830</a:t>
+                      </a:r>
+                      <a:endParaRPr sz="1200"/>
+                    </a:p>
+                  </a:txBody>
+                  <a:tcPr marL="73152" marR="73152" marT="27432" marB="27432" anchor="ctr">
+                    <a:lnL w="0">
+                      <a:noFill/>
+                    </a:lnL>
+                    <a:lnR w="0">
+                      <a:noFill/>
+                    </a:lnR>
+                    <a:lnT w="0">
+                      <a:noFill/>
+                    </a:lnT>
+                    <a:lnB w="0">
+                      <a:noFill/>
+                    </a:lnB>
+                    <a:noFill/>
+                  </a:tcPr>
+                </a:tc>
+                <a:tc>
+                  <a:txBody>
+                    <a:bodyPr wrap="square"/>
+                    <a:lstStyle/>
+                    <a:p>
+                      <a:pPr algn="r"/>
+                      <a:r>
+                        <a:rPr sz="1200" b="0" i="0">
+                          <a:solidFill>
+                            <a:srgbClr val="222222"/>
+                          </a:solidFill>
+                        </a:rPr>
+                        <a:t>3.287</a:t>
+                      </a:r>
+                      <a:endParaRPr sz="1200"/>
+                    </a:p>
+                  </a:txBody>
+                  <a:tcPr marL="73152" marR="73152" marT="27432" marB="27432" anchor="ctr">
+                    <a:lnL w="0">
+                      <a:noFill/>
+                    </a:lnL>
+                    <a:lnR w="0">
+                      <a:noFill/>
+                    </a:lnR>
+                    <a:lnT w="0">
+                      <a:noFill/>
+                    </a:lnT>
+                    <a:lnB w="0">
+                      <a:noFill/>
+                    </a:lnB>
+                    <a:noFill/>
+                  </a:tcPr>
+                </a:tc>
+                <a:tc>
+                  <a:txBody>
+                    <a:bodyPr wrap="square"/>
+                    <a:lstStyle/>
+                    <a:p>
+                      <a:pPr algn="r"/>
+                      <a:r>
+                        <a:rPr sz="1200" b="0" i="0">
+                          <a:solidFill>
+                            <a:srgbClr val="222222"/>
+                          </a:solidFill>
+                        </a:rPr>
+                        <a:t/>
+                      </a:r>
+                      <a:endParaRPr sz="1200"/>
+                    </a:p>
+                  </a:txBody>
+                  <a:tcPr marL="73152" marR="73152" marT="27432" marB="27432" anchor="ctr">
+                    <a:lnL w="0">
+                      <a:noFill/>
+                    </a:lnL>
+                    <a:lnR w="0">
+                      <a:noFill/>
+                    </a:lnR>
+                    <a:lnT w="0">
+                      <a:noFill/>
+                    </a:lnT>
+                    <a:lnB w="0">
+                      <a:noFill/>
+                    </a:lnB>
+                    <a:noFill/>
+                  </a:tcPr>
+                </a:tc>
+                <a:tc>
+                  <a:txBody>
+                    <a:bodyPr wrap="square"/>
+                    <a:lstStyle/>
+                    <a:p>
+                      <a:pPr algn="r"/>
+                      <a:r>
+                        <a:rPr sz="1200" b="0" i="0">
+                          <a:solidFill>
+                            <a:srgbClr val="222222"/>
+                          </a:solidFill>
+                        </a:rPr>
+                        <a:t>11.814</a:t>
+                      </a:r>
+                      <a:endParaRPr sz="1200"/>
+                    </a:p>
+                  </a:txBody>
+                  <a:tcPr marL="73152" marR="73152" marT="27432" marB="27432" anchor="ctr">
+                    <a:lnL w="0">
+                      <a:noFill/>
+                    </a:lnL>
+                    <a:lnR w="0">
+                      <a:noFill/>
+                    </a:lnR>
+                    <a:lnT w="0">
+                      <a:noFill/>
+                    </a:lnT>
+                    <a:lnB w="0">
+                      <a:noFill/>
+                    </a:lnB>
+                    <a:noFill/>
+                  </a:tcPr>
+                </a:tc>
+                <a:tc>
+                  <a:txBody>
+                    <a:bodyPr wrap="square"/>
+                    <a:lstStyle/>
+                    <a:p>
+                      <a:pPr algn="r"/>
+                      <a:r>
+                        <a:rPr sz="1200" b="0" i="0">
+                          <a:solidFill>
+                            <a:srgbClr val="222222"/>
+                          </a:solidFill>
+                        </a:rPr>
+                        <a:t>&lt; .001</a:t>
+                      </a:r>
+                      <a:endParaRPr sz="1200"/>
+                    </a:p>
+                  </a:txBody>
+                  <a:tcPr marL="73152" marR="73152" marT="27432" marB="27432" anchor="ctr">
+                    <a:lnL w="0">
+                      <a:noFill/>
+                    </a:lnL>
+                    <a:lnR w="0">
+                      <a:noFill/>
+                    </a:lnR>
+                    <a:lnT w="0">
+                      <a:noFill/>
+                    </a:lnT>
+                    <a:lnB w="0">
+                      <a:noFill/>
+                    </a:lnB>
+                    <a:noFill/>
+                  </a:tcPr>
+                </a:tc>
+              </a:tr>
+              <a:tr h="292608">
+                <a:tc>
+                  <a:txBody>
+                    <a:bodyPr wrap="square"/>
+                    <a:lstStyle/>
+                    <a:p>
+                      <a:pPr algn="l"/>
+                      <a:r>
+                        <a:rPr sz="1200" b="0" i="0">
+                          <a:solidFill>
+                            <a:srgbClr val="222222"/>
+                          </a:solidFill>
+                        </a:rPr>
+                        <a:t>M₁</a:t>
+                      </a:r>
+                      <a:endParaRPr sz="1200"/>
+                    </a:p>
+                  </a:txBody>
+                  <a:tcPr marL="73152" marR="73152" marT="27432" marB="27432" anchor="ctr">
+                    <a:lnL w="0">
+                      <a:noFill/>
+                    </a:lnL>
+                    <a:lnR w="0">
+                      <a:noFill/>
+                    </a:lnR>
+                    <a:lnT w="0">
+                      <a:noFill/>
+                    </a:lnT>
+                    <a:lnB w="0">
+                      <a:noFill/>
+                    </a:lnB>
+                    <a:noFill/>
+                  </a:tcPr>
+                </a:tc>
+                <a:tc>
+                  <a:txBody>
+                    <a:bodyPr wrap="square"/>
+                    <a:lstStyle/>
+                    <a:p>
+                      <a:pPr algn="r"/>
+                      <a:r>
+                        <a:rPr sz="1200" b="0" i="0">
+                          <a:solidFill>
+                            <a:srgbClr val="222222"/>
+                          </a:solidFill>
+                        </a:rPr>
+                        <a:t>(Intercept)</a:t>
+                      </a:r>
+                      <a:endParaRPr sz="1200"/>
+                    </a:p>
+                  </a:txBody>
+                  <a:tcPr marL="73152" marR="73152" marT="27432" marB="27432" anchor="ctr">
+                    <a:lnL w="0">
+                      <a:noFill/>
+                    </a:lnL>
+                    <a:lnR w="0">
+                      <a:noFill/>
+                    </a:lnR>
+                    <a:lnT w="0">
+                      <a:noFill/>
+                    </a:lnT>
+                    <a:lnB w="0">
+                      <a:noFill/>
+                    </a:lnB>
+                    <a:noFill/>
+                  </a:tcPr>
+                </a:tc>
+                <a:tc>
+                  <a:txBody>
+                    <a:bodyPr wrap="square"/>
+                    <a:lstStyle/>
+                    <a:p>
+                      <a:pPr algn="r"/>
+                      <a:r>
+                        <a:rPr sz="1200" b="0" i="0">
+                          <a:solidFill>
+                            <a:srgbClr val="222222"/>
+                          </a:solidFill>
+                        </a:rPr>
+                        <a:t>77.062</a:t>
+                      </a:r>
+                      <a:endParaRPr sz="1200"/>
+                    </a:p>
+                  </a:txBody>
+                  <a:tcPr marL="73152" marR="73152" marT="27432" marB="27432" anchor="ctr">
+                    <a:lnL w="0">
+                      <a:noFill/>
+                    </a:lnL>
+                    <a:lnR w="0">
+                      <a:noFill/>
+                    </a:lnR>
+                    <a:lnT w="0">
+                      <a:noFill/>
+                    </a:lnT>
+                    <a:lnB w="0">
+                      <a:noFill/>
+                    </a:lnB>
+                    <a:noFill/>
+                  </a:tcPr>
+                </a:tc>
+                <a:tc>
+                  <a:txBody>
+                    <a:bodyPr wrap="square"/>
+                    <a:lstStyle/>
+                    <a:p>
+                      <a:pPr algn="r"/>
+                      <a:r>
+                        <a:rPr sz="1200" b="0" i="0">
+                          <a:solidFill>
+                            <a:srgbClr val="222222"/>
+                          </a:solidFill>
+                        </a:rPr>
+                        <a:t>9.721</a:t>
+                      </a:r>
+                      <a:endParaRPr sz="1200"/>
+                    </a:p>
+                  </a:txBody>
+                  <a:tcPr marL="73152" marR="73152" marT="27432" marB="27432" anchor="ctr">
+                    <a:lnL w="0">
+                      <a:noFill/>
+                    </a:lnL>
+                    <a:lnR w="0">
+                      <a:noFill/>
+                    </a:lnR>
+                    <a:lnT w="0">
+                      <a:noFill/>
+                    </a:lnT>
+                    <a:lnB w="0">
+                      <a:noFill/>
+                    </a:lnB>
+                    <a:noFill/>
+                  </a:tcPr>
+                </a:tc>
+                <a:tc>
+                  <a:txBody>
+                    <a:bodyPr wrap="square"/>
+                    <a:lstStyle/>
+                    <a:p>
+                      <a:pPr algn="r"/>
+                      <a:r>
+                        <a:rPr sz="1200" b="0" i="0">
+                          <a:solidFill>
+                            <a:srgbClr val="222222"/>
+                          </a:solidFill>
+                        </a:rPr>
+                        <a:t/>
+                      </a:r>
+                      <a:endParaRPr sz="1200"/>
+                    </a:p>
+                  </a:txBody>
+                  <a:tcPr marL="73152" marR="73152" marT="27432" marB="27432" anchor="ctr">
+                    <a:lnL w="0">
+                      <a:noFill/>
+                    </a:lnL>
+                    <a:lnR w="0">
+                      <a:noFill/>
+                    </a:lnR>
+                    <a:lnT w="0">
+                      <a:noFill/>
+                    </a:lnT>
+                    <a:lnB w="0">
+                      <a:noFill/>
+                    </a:lnB>
+                    <a:noFill/>
+                  </a:tcPr>
+                </a:tc>
+                <a:tc>
+                  <a:txBody>
+                    <a:bodyPr wrap="square"/>
+                    <a:lstStyle/>
+                    <a:p>
+                      <a:pPr algn="r"/>
+                      <a:r>
+                        <a:rPr sz="1200" b="0" i="0">
+                          <a:solidFill>
+                            <a:srgbClr val="222222"/>
+                          </a:solidFill>
+                        </a:rPr>
+                        <a:t>7.927</a:t>
+                      </a:r>
+                      <a:endParaRPr sz="1200"/>
+                    </a:p>
+                  </a:txBody>
+                  <a:tcPr marL="73152" marR="73152" marT="27432" marB="27432" anchor="ctr">
+                    <a:lnL w="0">
+                      <a:noFill/>
+                    </a:lnL>
+                    <a:lnR w="0">
+                      <a:noFill/>
+                    </a:lnR>
+                    <a:lnT w="0">
+                      <a:noFill/>
+                    </a:lnT>
+                    <a:lnB w="0">
+                      <a:noFill/>
+                    </a:lnB>
+                    <a:noFill/>
+                  </a:tcPr>
+                </a:tc>
+                <a:tc>
+                  <a:txBody>
+                    <a:bodyPr wrap="square"/>
+                    <a:lstStyle/>
+                    <a:p>
+                      <a:pPr algn="r"/>
+                      <a:r>
+                        <a:rPr sz="1200" b="0" i="0">
+                          <a:solidFill>
+                            <a:srgbClr val="222222"/>
+                          </a:solidFill>
+                        </a:rPr>
+                        <a:t>&lt; .001</a:t>
+                      </a:r>
+                      <a:endParaRPr sz="1200"/>
+                    </a:p>
+                  </a:txBody>
+                  <a:tcPr marL="73152" marR="73152" marT="27432" marB="27432" anchor="ctr">
+                    <a:lnL w="0">
+                      <a:noFill/>
+                    </a:lnL>
+                    <a:lnR w="0">
+                      <a:noFill/>
+                    </a:lnR>
+                    <a:lnT w="0">
+                      <a:noFill/>
+                    </a:lnT>
+                    <a:lnB w="0">
+                      <a:noFill/>
+                    </a:lnB>
+                    <a:noFill/>
+                  </a:tcPr>
+                </a:tc>
+              </a:tr>
+              <a:tr h="292608">
+                <a:tc>
+                  <a:txBody>
+                    <a:bodyPr wrap="square"/>
+                    <a:lstStyle/>
+                    <a:p>
+                      <a:pPr algn="l"/>
+                      <a:r>
+                        <a:rPr sz="1200" b="0" i="0">
+                          <a:solidFill>
+                            <a:srgbClr val="222222"/>
+                          </a:solidFill>
+                        </a:rPr>
+                        <a:t/>
+                      </a:r>
+                      <a:endParaRPr sz="1200"/>
+                    </a:p>
+                  </a:txBody>
+                  <a:tcPr marL="73152" marR="73152" marT="27432" marB="27432" anchor="ctr">
+                    <a:lnL w="0">
+                      <a:noFill/>
+                    </a:lnL>
+                    <a:lnR w="0">
+                      <a:noFill/>
+                    </a:lnR>
+                    <a:lnT w="0">
+                      <a:noFill/>
+                    </a:lnT>
+                    <a:lnB w="12700">
+                      <a:solidFill>
+                        <a:srgbClr val="222222"/>
+                      </a:solidFill>
+                    </a:lnB>
+                    <a:noFill/>
+                  </a:tcPr>
+                </a:tc>
+                <a:tc>
+                  <a:txBody>
+                    <a:bodyPr wrap="square"/>
+                    <a:lstStyle/>
+                    <a:p>
+                      <a:pPr algn="r"/>
+                      <a:r>
+                        <a:rPr sz="1200" b="0" i="0">
+                          <a:solidFill>
+                            <a:srgbClr val="222222"/>
+                          </a:solidFill>
+                        </a:rPr>
+                        <a:t>Income inequality</a:t>
+                      </a:r>
+                      <a:endParaRPr sz="1200"/>
+                    </a:p>
+                  </a:txBody>
+                  <a:tcPr marL="73152" marR="73152" marT="27432" marB="27432" anchor="ctr">
+                    <a:lnL w="0">
+                      <a:noFill/>
+                    </a:lnL>
+                    <a:lnR w="0">
+                      <a:noFill/>
+                    </a:lnR>
+                    <a:lnT w="0">
+                      <a:noFill/>
+                    </a:lnT>
+                    <a:lnB w="12700">
+                      <a:solidFill>
+                        <a:srgbClr val="222222"/>
+                      </a:solidFill>
+                    </a:lnB>
+                    <a:noFill/>
+                  </a:tcPr>
+                </a:tc>
+                <a:tc>
+                  <a:txBody>
+                    <a:bodyPr wrap="square"/>
+                    <a:lstStyle/>
+                    <a:p>
+                      <a:pPr algn="r"/>
+                      <a:r>
+                        <a:rPr sz="1200" b="0" i="0">
+                          <a:solidFill>
+                            <a:srgbClr val="222222"/>
+                          </a:solidFill>
+                        </a:rPr>
+                        <a:t>−6.535</a:t>
+                      </a:r>
+                      <a:endParaRPr sz="1200"/>
+                    </a:p>
+                  </a:txBody>
+                  <a:tcPr marL="73152" marR="73152" marT="27432" marB="27432" anchor="ctr">
+                    <a:lnL w="0">
+                      <a:noFill/>
+                    </a:lnL>
+                    <a:lnR w="0">
+                      <a:noFill/>
+                    </a:lnR>
+                    <a:lnT w="0">
+                      <a:noFill/>
+                    </a:lnT>
+                    <a:lnB w="12700">
+                      <a:solidFill>
+                        <a:srgbClr val="222222"/>
+                      </a:solidFill>
+                    </a:lnB>
+                    <a:noFill/>
+                  </a:tcPr>
+                </a:tc>
+                <a:tc>
+                  <a:txBody>
+                    <a:bodyPr wrap="square"/>
+                    <a:lstStyle/>
+                    <a:p>
+                      <a:pPr algn="r"/>
+                      <a:r>
+                        <a:rPr sz="1200" b="0" i="0">
+                          <a:solidFill>
+                            <a:srgbClr val="222222"/>
+                          </a:solidFill>
+                        </a:rPr>
+                        <a:t>1.605</a:t>
+                      </a:r>
+                      <a:endParaRPr sz="1200"/>
+                    </a:p>
+                  </a:txBody>
+                  <a:tcPr marL="73152" marR="73152" marT="27432" marB="27432" anchor="ctr">
+                    <a:lnL w="0">
+                      <a:noFill/>
+                    </a:lnL>
+                    <a:lnR w="0">
+                      <a:noFill/>
+                    </a:lnR>
+                    <a:lnT w="0">
+                      <a:noFill/>
+                    </a:lnT>
+                    <a:lnB w="12700">
+                      <a:solidFill>
+                        <a:srgbClr val="222222"/>
+                      </a:solidFill>
+                    </a:lnB>
+                    <a:noFill/>
+                  </a:tcPr>
+                </a:tc>
+                <a:tc>
+                  <a:txBody>
+                    <a:bodyPr wrap="square"/>
+                    <a:lstStyle/>
+                    <a:p>
+                      <a:pPr algn="r"/>
+                      <a:r>
+                        <a:rPr sz="1200" b="0" i="0">
+                          <a:solidFill>
+                            <a:srgbClr val="222222"/>
+                          </a:solidFill>
+                        </a:rPr>
+                        <a:t>−0.664</a:t>
+                      </a:r>
+                      <a:endParaRPr sz="1200"/>
+                    </a:p>
+                  </a:txBody>
+                  <a:tcPr marL="73152" marR="73152" marT="27432" marB="27432" anchor="ctr">
+                    <a:lnL w="0">
+                      <a:noFill/>
+                    </a:lnL>
+                    <a:lnR w="0">
+                      <a:noFill/>
+                    </a:lnR>
+                    <a:lnT w="0">
+                      <a:noFill/>
+                    </a:lnT>
+                    <a:lnB w="12700">
+                      <a:solidFill>
+                        <a:srgbClr val="222222"/>
+                      </a:solidFill>
+                    </a:lnB>
+                    <a:noFill/>
+                  </a:tcPr>
+                </a:tc>
+                <a:tc>
+                  <a:txBody>
+                    <a:bodyPr wrap="square"/>
+                    <a:lstStyle/>
+                    <a:p>
+                      <a:pPr algn="r"/>
+                      <a:r>
+                        <a:rPr sz="1200" b="0" i="0">
+                          <a:solidFill>
+                            <a:srgbClr val="222222"/>
+                          </a:solidFill>
+                        </a:rPr>
+                        <a:t>−4.071</a:t>
+                      </a:r>
+                      <a:endParaRPr sz="1200"/>
+                    </a:p>
+                  </a:txBody>
+                  <a:tcPr marL="73152" marR="73152" marT="27432" marB="27432" anchor="ctr">
+                    <a:lnL w="0">
+                      <a:noFill/>
+                    </a:lnL>
+                    <a:lnR w="0">
+                      <a:noFill/>
+                    </a:lnR>
+                    <a:lnT w="0">
+                      <a:noFill/>
+                    </a:lnT>
+                    <a:lnB w="12700">
+                      <a:solidFill>
+                        <a:srgbClr val="222222"/>
+                      </a:solidFill>
+                    </a:lnB>
+                    <a:noFill/>
+                  </a:tcPr>
+                </a:tc>
+                <a:tc>
+                  <a:txBody>
+                    <a:bodyPr wrap="square"/>
+                    <a:lstStyle/>
+                    <a:p>
+                      <a:pPr algn="r"/>
+                      <a:r>
+                        <a:rPr sz="1200" b="0" i="0">
+                          <a:solidFill>
+                            <a:srgbClr val="222222"/>
+                          </a:solidFill>
+                        </a:rPr>
+                        <a:t>&lt; .001</a:t>
+                      </a:r>
+                      <a:endParaRPr sz="1200"/>
+                    </a:p>
+                  </a:txBody>
+                  <a:tcPr marL="73152" marR="73152" marT="27432" marB="27432" anchor="ctr">
+                    <a:lnL w="0">
+                      <a:noFill/>
+                    </a:lnL>
+                    <a:lnR w="0">
+                      <a:noFill/>
+                    </a:lnR>
+                    <a:lnT w="0">
+                      <a:noFill/>
+                    </a:lnT>
+                    <a:lnB w="12700">
+                      <a:solidFill>
+                        <a:srgbClr val="222222"/>
+                      </a:solidFill>
+                    </a:lnB>
+                    <a:noFill/>
+                  </a:tcPr>
+                </a:tc>
+              </a:tr>
+            </a:tbl>
+          </a:graphicData>
+        </a:graphic>
+      </p:graphicFrame>
+      <p:sp>
+        <p:nvSpPr>
+          <p:cNvPr id="11" name="Oval 10"/>
           <p:cNvSpPr/>
           <p:nvPr/>
         </p:nvSpPr>
         <p:spPr>
           <a:xfrm>
-            <a:off x="758952" y="3703320"/>
-            <a:ext cx="3429000" cy="2057400"/>
-          </a:xfrm>
-          <a:prstGeom prst="roundRect">
-            <a:avLst>
-              <a:gd name="adj" fmla="val 8000"/>
-            </a:avLst>
+            <a:off x="3035808" y="1261872"/>
+            <a:ext cx="292608" cy="292608"/>
+          </a:xfrm>
+          <a:prstGeom prst="ellipse">
+            <a:avLst/>
           </a:prstGeom>
           <a:solidFill>
-            <a:srgbClr val="1F394D"/>
+            <a:srgbClr val="B88C00"/>
           </a:solidFill>
           <a:ln>
             <a:noFill/>
           </a:ln>
         </p:spPr>
         <p:txBody>
-          <a:bodyPr rtlCol="0" anchor="ctr"/>
-          <a:lstStyle/>
-          <a:p>
-            <a:endParaRPr/>
-          </a:p>
-        </p:txBody>
-      </p:sp>
-      <p:sp>
-        <p:nvSpPr>
-          <p:cNvPr id="9" name="TextBox 8"/>
-          <p:cNvSpPr txBox="1"/>
-          <p:nvPr/>
-        </p:nvSpPr>
-        <p:spPr>
-          <a:xfrm>
-            <a:off x="960120" y="3864254"/>
-            <a:ext cx="3026664" cy="1735531"/>
-          </a:xfrm>
-          <a:prstGeom prst="rect">
-            <a:avLst/>
-          </a:prstGeom>
-          <a:noFill/>
-        </p:spPr>
-        <p:txBody>
-          <a:bodyPr wrap="square" lIns="0" tIns="0" rIns="0" bIns="0" anchor="t">
-            <a:spAutoFit/>
-          </a:bodyPr>
-          <a:lstStyle/>
-          <a:p>
-            <a:pPr algn="l">
-              <a:spcAft>
-                <a:spcPts val="400"/>
-              </a:spcAft>
-            </a:pPr>
-            <a:r>
-              <a:rPr sz="2000" b="1" i="0">
+          <a:bodyPr rtlCol="0" anchor="ctr" wrap="square" lIns="0" rIns="0" tIns="18288" bIns="18288"/>
+          <a:lstStyle/>
+          <a:p>
+            <a:pPr algn="ctr"/>
+            <a:r>
+              <a:rPr sz="1200" b="1" i="0">
                 <a:solidFill>
-                  <a:srgbClr val="B88C00"/>
+                  <a:srgbClr val="FFFFFF"/>
                 </a:solidFill>
               </a:rPr>
-              <a:t>Slope</a:t>
-            </a:r>
-          </a:p>
-          <a:p>
-            <a:pPr algn="l">
-              <a:spcAft>
-                <a:spcPts val="400"/>
-              </a:spcAft>
-            </a:pPr>
-            <a:r>
-              <a:rPr sz="1600" b="0" i="0">
-                <a:solidFill>
-                  <a:srgbClr val="CCDDEA"/>
-                </a:solidFill>
-              </a:rPr>
-              <a:t>Each one-unit rise in the inequality ratio goes with 6.5 percentage points less trust.</a:t>
-            </a:r>
-          </a:p>
-        </p:txBody>
-      </p:sp>
-      <p:sp>
-        <p:nvSpPr>
-          <p:cNvPr id="10" name="Rounded Rectangle 9"/>
+              <a:t>1</a:t>
+            </a:r>
+            <a:endParaRPr sz="1200"/>
+          </a:p>
+        </p:txBody>
+      </p:sp>
+      <p:sp>
+        <p:nvSpPr>
+          <p:cNvPr id="12" name="Oval 11"/>
           <p:cNvSpPr/>
           <p:nvPr/>
         </p:nvSpPr>
         <p:spPr>
           <a:xfrm>
-            <a:off x="4370832" y="3703320"/>
-            <a:ext cx="3429000" cy="2057400"/>
-          </a:xfrm>
-          <a:prstGeom prst="roundRect">
-            <a:avLst>
-              <a:gd name="adj" fmla="val 8000"/>
-            </a:avLst>
+            <a:off x="5413248" y="1261872"/>
+            <a:ext cx="292608" cy="292608"/>
+          </a:xfrm>
+          <a:prstGeom prst="ellipse">
+            <a:avLst/>
           </a:prstGeom>
           <a:solidFill>
-            <a:srgbClr val="EEF3F7"/>
+            <a:srgbClr val="B88C00"/>
           </a:solidFill>
           <a:ln>
             <a:noFill/>
           </a:ln>
         </p:spPr>
         <p:txBody>
-          <a:bodyPr rtlCol="0" anchor="ctr"/>
-          <a:lstStyle/>
-          <a:p>
-            <a:endParaRPr/>
-          </a:p>
-        </p:txBody>
-      </p:sp>
-      <p:sp>
-        <p:nvSpPr>
-          <p:cNvPr id="11" name="TextBox 10"/>
+          <a:bodyPr rtlCol="0" anchor="ctr" wrap="square" lIns="0" rIns="0" tIns="18288" bIns="18288"/>
+          <a:lstStyle/>
+          <a:p>
+            <a:pPr algn="ctr"/>
+            <a:r>
+              <a:rPr sz="1200" b="1" i="0">
+                <a:solidFill>
+                  <a:srgbClr val="FFFFFF"/>
+                </a:solidFill>
+              </a:rPr>
+              <a:t>2</a:t>
+            </a:r>
+            <a:endParaRPr sz="1200"/>
+          </a:p>
+        </p:txBody>
+      </p:sp>
+      <p:sp>
+        <p:nvSpPr>
+          <p:cNvPr id="13" name="Oval 12"/>
+          <p:cNvSpPr/>
+          <p:nvPr/>
+        </p:nvSpPr>
+        <p:spPr>
+          <a:xfrm>
+            <a:off x="402335" y="3447287"/>
+            <a:ext cx="292608" cy="292608"/>
+          </a:xfrm>
+          <a:prstGeom prst="ellipse">
+            <a:avLst/>
+          </a:prstGeom>
+          <a:solidFill>
+            <a:srgbClr val="B88C00"/>
+          </a:solidFill>
+          <a:ln>
+            <a:noFill/>
+          </a:ln>
+        </p:spPr>
+        <p:txBody>
+          <a:bodyPr rtlCol="0" anchor="ctr" wrap="square" lIns="0" rIns="0" tIns="18288" bIns="18288"/>
+          <a:lstStyle/>
+          <a:p>
+            <a:pPr algn="ctr"/>
+            <a:r>
+              <a:rPr sz="1200" b="1" i="0">
+                <a:solidFill>
+                  <a:srgbClr val="FFFFFF"/>
+                </a:solidFill>
+              </a:rPr>
+              <a:t>3</a:t>
+            </a:r>
+            <a:endParaRPr sz="1200"/>
+          </a:p>
+        </p:txBody>
+      </p:sp>
+      <p:sp>
+        <p:nvSpPr>
+          <p:cNvPr id="14" name="Oval 13"/>
+          <p:cNvSpPr/>
+          <p:nvPr/>
+        </p:nvSpPr>
+        <p:spPr>
+          <a:xfrm>
+            <a:off x="3973068" y="2852927"/>
+            <a:ext cx="292608" cy="292608"/>
+          </a:xfrm>
+          <a:prstGeom prst="ellipse">
+            <a:avLst/>
+          </a:prstGeom>
+          <a:solidFill>
+            <a:srgbClr val="B88C00"/>
+          </a:solidFill>
+          <a:ln>
+            <a:noFill/>
+          </a:ln>
+        </p:spPr>
+        <p:txBody>
+          <a:bodyPr rtlCol="0" anchor="ctr" wrap="square" lIns="0" rIns="0" tIns="18288" bIns="18288"/>
+          <a:lstStyle/>
+          <a:p>
+            <a:pPr algn="ctr"/>
+            <a:r>
+              <a:rPr sz="1200" b="1" i="0">
+                <a:solidFill>
+                  <a:srgbClr val="FFFFFF"/>
+                </a:solidFill>
+              </a:rPr>
+              <a:t>4</a:t>
+            </a:r>
+            <a:endParaRPr sz="1200"/>
+          </a:p>
+        </p:txBody>
+      </p:sp>
+      <p:sp>
+        <p:nvSpPr>
+          <p:cNvPr id="15" name="Oval 14"/>
+          <p:cNvSpPr/>
+          <p:nvPr/>
+        </p:nvSpPr>
+        <p:spPr>
+          <a:xfrm>
+            <a:off x="6830568" y="2852927"/>
+            <a:ext cx="292608" cy="292608"/>
+          </a:xfrm>
+          <a:prstGeom prst="ellipse">
+            <a:avLst/>
+          </a:prstGeom>
+          <a:solidFill>
+            <a:srgbClr val="B88C00"/>
+          </a:solidFill>
+          <a:ln>
+            <a:noFill/>
+          </a:ln>
+        </p:spPr>
+        <p:txBody>
+          <a:bodyPr rtlCol="0" anchor="ctr" wrap="square" lIns="0" rIns="0" tIns="18288" bIns="18288"/>
+          <a:lstStyle/>
+          <a:p>
+            <a:pPr algn="ctr"/>
+            <a:r>
+              <a:rPr sz="1200" b="1" i="0">
+                <a:solidFill>
+                  <a:srgbClr val="FFFFFF"/>
+                </a:solidFill>
+              </a:rPr>
+              <a:t>5</a:t>
+            </a:r>
+            <a:endParaRPr sz="1200"/>
+          </a:p>
+        </p:txBody>
+      </p:sp>
+      <p:sp>
+        <p:nvSpPr>
+          <p:cNvPr id="16" name="Oval 15"/>
+          <p:cNvSpPr/>
+          <p:nvPr/>
+        </p:nvSpPr>
+        <p:spPr>
+          <a:xfrm>
+            <a:off x="5413248" y="2852927"/>
+            <a:ext cx="292608" cy="292608"/>
+          </a:xfrm>
+          <a:prstGeom prst="ellipse">
+            <a:avLst/>
+          </a:prstGeom>
+          <a:solidFill>
+            <a:srgbClr val="B88C00"/>
+          </a:solidFill>
+          <a:ln>
+            <a:noFill/>
+          </a:ln>
+        </p:spPr>
+        <p:txBody>
+          <a:bodyPr rtlCol="0" anchor="ctr" wrap="square" lIns="0" rIns="0" tIns="18288" bIns="18288"/>
+          <a:lstStyle/>
+          <a:p>
+            <a:pPr algn="ctr"/>
+            <a:r>
+              <a:rPr sz="1200" b="1" i="0">
+                <a:solidFill>
+                  <a:srgbClr val="FFFFFF"/>
+                </a:solidFill>
+              </a:rPr>
+              <a:t>6</a:t>
+            </a:r>
+            <a:endParaRPr sz="1200"/>
+          </a:p>
+        </p:txBody>
+      </p:sp>
+      <p:sp>
+        <p:nvSpPr>
+          <p:cNvPr id="17" name="Oval 16"/>
+          <p:cNvSpPr/>
+          <p:nvPr/>
+        </p:nvSpPr>
+        <p:spPr>
+          <a:xfrm>
+            <a:off x="758952" y="4626864"/>
+            <a:ext cx="292608" cy="292608"/>
+          </a:xfrm>
+          <a:prstGeom prst="ellipse">
+            <a:avLst/>
+          </a:prstGeom>
+          <a:solidFill>
+            <a:srgbClr val="B88C00"/>
+          </a:solidFill>
+          <a:ln>
+            <a:noFill/>
+          </a:ln>
+        </p:spPr>
+        <p:txBody>
+          <a:bodyPr rtlCol="0" anchor="ctr" wrap="square" lIns="0" rIns="0" tIns="18288" bIns="18288"/>
+          <a:lstStyle/>
+          <a:p>
+            <a:pPr algn="ctr"/>
+            <a:r>
+              <a:rPr sz="1200" b="1" i="0">
+                <a:solidFill>
+                  <a:srgbClr val="FFFFFF"/>
+                </a:solidFill>
+              </a:rPr>
+              <a:t>1</a:t>
+            </a:r>
+            <a:endParaRPr sz="1200"/>
+          </a:p>
+        </p:txBody>
+      </p:sp>
+      <p:sp>
+        <p:nvSpPr>
+          <p:cNvPr id="18" name="TextBox 17"/>
           <p:cNvSpPr txBox="1"/>
           <p:nvPr/>
         </p:nvSpPr>
         <p:spPr>
           <a:xfrm>
-            <a:off x="4572000" y="3864254"/>
-            <a:ext cx="3026664" cy="1735531"/>
+            <a:off x="1143000" y="4553712"/>
+            <a:ext cx="3108960" cy="457199"/>
           </a:xfrm>
           <a:prstGeom prst="rect">
             <a:avLst/>
@@ -18181,83 +19635,72 @@
           <a:noFill/>
         </p:spPr>
         <p:txBody>
-          <a:bodyPr wrap="square" lIns="0" tIns="0" rIns="0" bIns="0" anchor="t">
+          <a:bodyPr wrap="square" lIns="0" rIns="0" tIns="0" bIns="0" anchor="ctr">
             <a:spAutoFit/>
           </a:bodyPr>
           <a:lstStyle/>
           <a:p>
-            <a:pPr algn="l">
-              <a:spcAft>
-                <a:spcPts val="400"/>
-              </a:spcAft>
-            </a:pPr>
-            <a:r>
-              <a:rPr sz="2000" b="1" i="0">
-                <a:solidFill>
-                  <a:srgbClr val="1F394D"/>
-                </a:solidFill>
-              </a:rPr>
-              <a:t>Intercept</a:t>
-            </a:r>
-          </a:p>
-          <a:p>
-            <a:pPr algn="l">
-              <a:spcAft>
-                <a:spcPts val="400"/>
-              </a:spcAft>
-            </a:pPr>
-            <a:r>
-              <a:rPr sz="1600" b="0" i="0">
+            <a:pPr algn="l"/>
+            <a:r>
+              <a:rPr sz="1300" b="0" i="0">
                 <a:solidFill>
                   <a:srgbClr val="1F2A33"/>
                 </a:solidFill>
               </a:rPr>
-              <a:t>Predicted trust when inequality = 0: 77%. The ratio can’t be below 1, so don’t interpret it.</a:t>
-            </a:r>
-          </a:p>
-        </p:txBody>
-      </p:sp>
-      <p:sp>
-        <p:nvSpPr>
-          <p:cNvPr id="12" name="Rounded Rectangle 11"/>
+              <a:t>R²: the share of the variation in trust that the line accounts for (44%)</a:t>
+            </a:r>
+            <a:endParaRPr sz="1300"/>
+          </a:p>
+        </p:txBody>
+      </p:sp>
+      <p:sp>
+        <p:nvSpPr>
+          <p:cNvPr id="19" name="Oval 18"/>
           <p:cNvSpPr/>
           <p:nvPr/>
         </p:nvSpPr>
         <p:spPr>
           <a:xfrm>
-            <a:off x="7982712" y="3703320"/>
-            <a:ext cx="3429000" cy="2057400"/>
-          </a:xfrm>
-          <a:prstGeom prst="roundRect">
-            <a:avLst>
-              <a:gd name="adj" fmla="val 8000"/>
-            </a:avLst>
+            <a:off x="4325112" y="4626864"/>
+            <a:ext cx="292608" cy="292608"/>
+          </a:xfrm>
+          <a:prstGeom prst="ellipse">
+            <a:avLst/>
           </a:prstGeom>
           <a:solidFill>
-            <a:srgbClr val="EEF3F7"/>
+            <a:srgbClr val="B88C00"/>
           </a:solidFill>
           <a:ln>
             <a:noFill/>
           </a:ln>
         </p:spPr>
         <p:txBody>
-          <a:bodyPr rtlCol="0" anchor="ctr"/>
-          <a:lstStyle/>
-          <a:p>
-            <a:endParaRPr/>
-          </a:p>
-        </p:txBody>
-      </p:sp>
-      <p:sp>
-        <p:nvSpPr>
-          <p:cNvPr id="13" name="TextBox 12"/>
+          <a:bodyPr rtlCol="0" anchor="ctr" wrap="square" lIns="0" rIns="0" tIns="18288" bIns="18288"/>
+          <a:lstStyle/>
+          <a:p>
+            <a:pPr algn="ctr"/>
+            <a:r>
+              <a:rPr sz="1200" b="1" i="0">
+                <a:solidFill>
+                  <a:srgbClr val="FFFFFF"/>
+                </a:solidFill>
+              </a:rPr>
+              <a:t>2</a:t>
+            </a:r>
+            <a:endParaRPr sz="1200"/>
+          </a:p>
+        </p:txBody>
+      </p:sp>
+      <p:sp>
+        <p:nvSpPr>
+          <p:cNvPr id="20" name="TextBox 19"/>
           <p:cNvSpPr txBox="1"/>
           <p:nvPr/>
         </p:nvSpPr>
         <p:spPr>
           <a:xfrm>
-            <a:off x="8183880" y="3864254"/>
-            <a:ext cx="3026664" cy="1735531"/>
+            <a:off x="4709159" y="4553712"/>
+            <a:ext cx="3108960" cy="457199"/>
           </a:xfrm>
           <a:prstGeom prst="rect">
             <a:avLst/>
@@ -18265,45 +19708,319 @@
           <a:noFill/>
         </p:spPr>
         <p:txBody>
-          <a:bodyPr wrap="square" lIns="0" tIns="0" rIns="0" bIns="0" anchor="t">
+          <a:bodyPr wrap="square" lIns="0" rIns="0" tIns="0" bIns="0" anchor="ctr">
             <a:spAutoFit/>
           </a:bodyPr>
           <a:lstStyle/>
           <a:p>
-            <a:pPr algn="l">
-              <a:spcAft>
-                <a:spcPts val="400"/>
-              </a:spcAft>
-            </a:pPr>
-            <a:r>
-              <a:rPr sz="2000" b="1" i="0">
-                <a:solidFill>
-                  <a:srgbClr val="1F394D"/>
-                </a:solidFill>
-              </a:rPr>
-              <a:t>R²</a:t>
-            </a:r>
-          </a:p>
-          <a:p>
-            <a:pPr algn="l">
-              <a:spcAft>
-                <a:spcPts val="400"/>
-              </a:spcAft>
-            </a:pPr>
-            <a:r>
-              <a:rPr sz="1600" b="0" i="0">
+            <a:pPr algn="l"/>
+            <a:r>
+              <a:rPr sz="1300" b="0" i="0">
                 <a:solidFill>
                   <a:srgbClr val="1F2A33"/>
                 </a:solidFill>
               </a:rPr>
-              <a:t>44% of the cross-country variation in trust goes with inequality.</a:t>
-            </a:r>
-          </a:p>
-        </p:txBody>
-      </p:sp>
-      <p:sp>
-        <p:nvSpPr>
-          <p:cNvPr id="14" name="TextBox 13"/>
+              <a:t>RMSE: the typical size of a prediction error, in percentage points (12)</a:t>
+            </a:r>
+            <a:endParaRPr sz="1300"/>
+          </a:p>
+        </p:txBody>
+      </p:sp>
+      <p:sp>
+        <p:nvSpPr>
+          <p:cNvPr id="21" name="Oval 20"/>
+          <p:cNvSpPr/>
+          <p:nvPr/>
+        </p:nvSpPr>
+        <p:spPr>
+          <a:xfrm>
+            <a:off x="7891271" y="4626864"/>
+            <a:ext cx="292608" cy="292608"/>
+          </a:xfrm>
+          <a:prstGeom prst="ellipse">
+            <a:avLst/>
+          </a:prstGeom>
+          <a:solidFill>
+            <a:srgbClr val="B88C00"/>
+          </a:solidFill>
+          <a:ln>
+            <a:noFill/>
+          </a:ln>
+        </p:spPr>
+        <p:txBody>
+          <a:bodyPr rtlCol="0" anchor="ctr" wrap="square" lIns="0" rIns="0" tIns="18288" bIns="18288"/>
+          <a:lstStyle/>
+          <a:p>
+            <a:pPr algn="ctr"/>
+            <a:r>
+              <a:rPr sz="1200" b="1" i="0">
+                <a:solidFill>
+                  <a:srgbClr val="FFFFFF"/>
+                </a:solidFill>
+              </a:rPr>
+              <a:t>3</a:t>
+            </a:r>
+            <a:endParaRPr sz="1200"/>
+          </a:p>
+        </p:txBody>
+      </p:sp>
+      <p:sp>
+        <p:nvSpPr>
+          <p:cNvPr id="22" name="TextBox 21"/>
+          <p:cNvSpPr txBox="1"/>
+          <p:nvPr/>
+        </p:nvSpPr>
+        <p:spPr>
+          <a:xfrm>
+            <a:off x="8275319" y="4553712"/>
+            <a:ext cx="3108960" cy="457199"/>
+          </a:xfrm>
+          <a:prstGeom prst="rect">
+            <a:avLst/>
+          </a:prstGeom>
+          <a:noFill/>
+        </p:spPr>
+        <p:txBody>
+          <a:bodyPr wrap="square" lIns="0" rIns="0" tIns="0" bIns="0" anchor="ctr">
+            <a:spAutoFit/>
+          </a:bodyPr>
+          <a:lstStyle/>
+          <a:p>
+            <a:pPr algn="l"/>
+            <a:r>
+              <a:rPr sz="1300" b="0" i="0">
+                <a:solidFill>
+                  <a:srgbClr val="1F2A33"/>
+                </a:solidFill>
+              </a:rPr>
+              <a:t>M₀: the null model, whose intercept is the mean trust (38.8%)</a:t>
+            </a:r>
+            <a:endParaRPr sz="1300"/>
+          </a:p>
+        </p:txBody>
+      </p:sp>
+      <p:sp>
+        <p:nvSpPr>
+          <p:cNvPr id="23" name="Oval 22"/>
+          <p:cNvSpPr/>
+          <p:nvPr/>
+        </p:nvSpPr>
+        <p:spPr>
+          <a:xfrm>
+            <a:off x="758952" y="5157216"/>
+            <a:ext cx="292608" cy="292608"/>
+          </a:xfrm>
+          <a:prstGeom prst="ellipse">
+            <a:avLst/>
+          </a:prstGeom>
+          <a:solidFill>
+            <a:srgbClr val="B88C00"/>
+          </a:solidFill>
+          <a:ln>
+            <a:noFill/>
+          </a:ln>
+        </p:spPr>
+        <p:txBody>
+          <a:bodyPr rtlCol="0" anchor="ctr" wrap="square" lIns="0" rIns="0" tIns="18288" bIns="18288"/>
+          <a:lstStyle/>
+          <a:p>
+            <a:pPr algn="ctr"/>
+            <a:r>
+              <a:rPr sz="1200" b="1" i="0">
+                <a:solidFill>
+                  <a:srgbClr val="FFFFFF"/>
+                </a:solidFill>
+              </a:rPr>
+              <a:t>4</a:t>
+            </a:r>
+            <a:endParaRPr sz="1200"/>
+          </a:p>
+        </p:txBody>
+      </p:sp>
+      <p:sp>
+        <p:nvSpPr>
+          <p:cNvPr id="24" name="TextBox 23"/>
+          <p:cNvSpPr txBox="1"/>
+          <p:nvPr/>
+        </p:nvSpPr>
+        <p:spPr>
+          <a:xfrm>
+            <a:off x="1143000" y="5084064"/>
+            <a:ext cx="3108960" cy="457199"/>
+          </a:xfrm>
+          <a:prstGeom prst="rect">
+            <a:avLst/>
+          </a:prstGeom>
+          <a:noFill/>
+        </p:spPr>
+        <p:txBody>
+          <a:bodyPr wrap="square" lIns="0" rIns="0" tIns="0" bIns="0" anchor="ctr">
+            <a:spAutoFit/>
+          </a:bodyPr>
+          <a:lstStyle/>
+          <a:p>
+            <a:pPr algn="l"/>
+            <a:r>
+              <a:rPr sz="1300" b="0" i="0">
+                <a:solidFill>
+                  <a:srgbClr val="1F2A33"/>
+                </a:solidFill>
+              </a:rPr>
+              <a:t>Unstandardized: the intercept and the slope, in the units of the variables</a:t>
+            </a:r>
+            <a:endParaRPr sz="1300"/>
+          </a:p>
+        </p:txBody>
+      </p:sp>
+      <p:sp>
+        <p:nvSpPr>
+          <p:cNvPr id="25" name="Oval 24"/>
+          <p:cNvSpPr/>
+          <p:nvPr/>
+        </p:nvSpPr>
+        <p:spPr>
+          <a:xfrm>
+            <a:off x="4325112" y="5157216"/>
+            <a:ext cx="292608" cy="292608"/>
+          </a:xfrm>
+          <a:prstGeom prst="ellipse">
+            <a:avLst/>
+          </a:prstGeom>
+          <a:solidFill>
+            <a:srgbClr val="B88C00"/>
+          </a:solidFill>
+          <a:ln>
+            <a:noFill/>
+          </a:ln>
+        </p:spPr>
+        <p:txBody>
+          <a:bodyPr rtlCol="0" anchor="ctr" wrap="square" lIns="0" rIns="0" tIns="18288" bIns="18288"/>
+          <a:lstStyle/>
+          <a:p>
+            <a:pPr algn="ctr"/>
+            <a:r>
+              <a:rPr sz="1200" b="1" i="0">
+                <a:solidFill>
+                  <a:srgbClr val="FFFFFF"/>
+                </a:solidFill>
+              </a:rPr>
+              <a:t>5</a:t>
+            </a:r>
+            <a:endParaRPr sz="1200"/>
+          </a:p>
+        </p:txBody>
+      </p:sp>
+      <p:sp>
+        <p:nvSpPr>
+          <p:cNvPr id="26" name="TextBox 25"/>
+          <p:cNvSpPr txBox="1"/>
+          <p:nvPr/>
+        </p:nvSpPr>
+        <p:spPr>
+          <a:xfrm>
+            <a:off x="4709159" y="5084064"/>
+            <a:ext cx="3108960" cy="457199"/>
+          </a:xfrm>
+          <a:prstGeom prst="rect">
+            <a:avLst/>
+          </a:prstGeom>
+          <a:noFill/>
+        </p:spPr>
+        <p:txBody>
+          <a:bodyPr wrap="square" lIns="0" rIns="0" tIns="0" bIns="0" anchor="ctr">
+            <a:spAutoFit/>
+          </a:bodyPr>
+          <a:lstStyle/>
+          <a:p>
+            <a:pPr algn="l"/>
+            <a:r>
+              <a:rPr sz="1300" b="0" i="0">
+                <a:solidFill>
+                  <a:srgbClr val="1F2A33"/>
+                </a:solidFill>
+              </a:rPr>
+              <a:t>Standardized: the slope in standard deviations, equal to r with one predictor</a:t>
+            </a:r>
+            <a:endParaRPr sz="1300"/>
+          </a:p>
+        </p:txBody>
+      </p:sp>
+      <p:sp>
+        <p:nvSpPr>
+          <p:cNvPr id="27" name="Oval 26"/>
+          <p:cNvSpPr/>
+          <p:nvPr/>
+        </p:nvSpPr>
+        <p:spPr>
+          <a:xfrm>
+            <a:off x="7891271" y="5157216"/>
+            <a:ext cx="292608" cy="292608"/>
+          </a:xfrm>
+          <a:prstGeom prst="ellipse">
+            <a:avLst/>
+          </a:prstGeom>
+          <a:solidFill>
+            <a:srgbClr val="B88C00"/>
+          </a:solidFill>
+          <a:ln>
+            <a:noFill/>
+          </a:ln>
+        </p:spPr>
+        <p:txBody>
+          <a:bodyPr rtlCol="0" anchor="ctr" wrap="square" lIns="0" rIns="0" tIns="18288" bIns="18288"/>
+          <a:lstStyle/>
+          <a:p>
+            <a:pPr algn="ctr"/>
+            <a:r>
+              <a:rPr sz="1200" b="1" i="0">
+                <a:solidFill>
+                  <a:srgbClr val="FFFFFF"/>
+                </a:solidFill>
+              </a:rPr>
+              <a:t>6</a:t>
+            </a:r>
+            <a:endParaRPr sz="1200"/>
+          </a:p>
+        </p:txBody>
+      </p:sp>
+      <p:sp>
+        <p:nvSpPr>
+          <p:cNvPr id="28" name="TextBox 27"/>
+          <p:cNvSpPr txBox="1"/>
+          <p:nvPr/>
+        </p:nvSpPr>
+        <p:spPr>
+          <a:xfrm>
+            <a:off x="8275319" y="5084064"/>
+            <a:ext cx="3108960" cy="457199"/>
+          </a:xfrm>
+          <a:prstGeom prst="rect">
+            <a:avLst/>
+          </a:prstGeom>
+          <a:noFill/>
+        </p:spPr>
+        <p:txBody>
+          <a:bodyPr wrap="square" lIns="0" rIns="0" tIns="0" bIns="0" anchor="ctr">
+            <a:spAutoFit/>
+          </a:bodyPr>
+          <a:lstStyle/>
+          <a:p>
+            <a:pPr algn="l"/>
+            <a:r>
+              <a:rPr sz="1300" b="0" i="0">
+                <a:solidFill>
+                  <a:srgbClr val="1F2A33"/>
+                </a:solidFill>
+              </a:rPr>
+              <a:t>Standard Error, t and p, and the ANOVA table: uncertainty (Week 5)</a:t>
+            </a:r>
+            <a:endParaRPr sz="1300"/>
+          </a:p>
+        </p:txBody>
+      </p:sp>
+      <p:sp>
+        <p:nvSpPr>
+          <p:cNvPr id="29" name="TextBox 28"/>
           <p:cNvSpPr txBox="1"/>
           <p:nvPr/>
         </p:nvSpPr>
@@ -18318,7 +20035,7 @@
           <a:noFill/>
         </p:spPr>
         <p:txBody>
-          <a:bodyPr wrap="square" lIns="0" tIns="0" rIns="0" bIns="0" anchor="ctr">
+          <a:bodyPr wrap="square" lIns="0" rIns="0" tIns="0" bIns="0" anchor="ctr">
             <a:spAutoFit/>
           </a:bodyPr>
           <a:lstStyle/>
@@ -18330,8 +20047,9 @@
                   <a:srgbClr val="55606B"/>
                 </a:solidFill>
               </a:rPr>
-              <a:t>Data: pickett2009.csv (Wilkinson &amp; Pickett 2009), 23 countries. Trust = % who say most people can be trusted.</a:t>
-            </a:r>
+              <a:t>Data: pickett2009.csv (Wilkinson &amp; Pickett 2009), 23 countries. JASP: Regression › Linear Regression; Trust as Dependent Variable, Income inequality as Covariate.</a:t>
+            </a:r>
+            <a:endParaRPr sz="1200"/>
           </a:p>
         </p:txBody>
       </p:sp>
@@ -31137,7 +32855,7 @@
 </file>
 
 <file path=ppt/slides/slide29.xml><?xml version="1.0" encoding="utf-8"?>
-<p:sld xmlns:a="http://schemas.openxmlformats.org/drawingml/2006/main" xmlns:r="http://schemas.openxmlformats.org/officeDocument/2006/relationships" xmlns:p="http://schemas.openxmlformats.org/presentationml/2006/main">
+<p:sld xmlns:a="http://schemas.openxmlformats.org/drawingml/2006/main" xmlns:p="http://schemas.openxmlformats.org/presentationml/2006/main" xmlns:r="http://schemas.openxmlformats.org/officeDocument/2006/relationships">
   <p:cSld>
     <p:spTree>
       <p:nvGrpSpPr>
@@ -31145,14 +32863,7 @@
         <p:cNvGrpSpPr/>
         <p:nvPr/>
       </p:nvGrpSpPr>
-      <p:grpSpPr>
-        <a:xfrm>
-          <a:off x="0" y="0"/>
-          <a:ext cx="0" cy="0"/>
-          <a:chOff x="0" y="0"/>
-          <a:chExt cx="0" cy="0"/>
-        </a:xfrm>
-      </p:grpSpPr>
+      <p:grpSpPr/>
       <p:sp>
         <p:nvSpPr>
           <p:cNvPr id="2" name="Title 1"/>
@@ -31169,7 +32880,7 @@
           <a:lstStyle/>
           <a:p>
             <a:r>
-              <a:t>Key takeaways</a:t>
+              <a:t>Reporting the results</a:t>
             </a:r>
           </a:p>
         </p:txBody>
@@ -31254,7 +32965,7 @@
           <a:p>
             <a:fld id="{9FAA51BB-2FC0-4DB8-B50E-F52D50E733B6}" type="slidenum">
               <a:rPr lang="en-GB" smtClean="0"/>
-              <a:t>29</a:t>
+              <a:t>28</a:t>
             </a:fld>
             <a:endParaRPr lang="en-GB"/>
           </a:p>
@@ -31262,14 +32973,14 @@
       </p:sp>
       <p:sp>
         <p:nvSpPr>
-          <p:cNvPr id="6" name="Card 1"/>
+          <p:cNvPr id="6" name="Rounded Rectangle 5"/>
           <p:cNvSpPr/>
           <p:nvPr/>
         </p:nvSpPr>
         <p:spPr>
           <a:xfrm>
-            <a:off x="758952" y="1417320"/>
-            <a:ext cx="5212080" cy="2103120"/>
+            <a:off x="758952" y="1371600"/>
+            <a:ext cx="6675120" cy="4434840"/>
           </a:xfrm>
           <a:prstGeom prst="roundRect">
             <a:avLst>
@@ -31287,23 +32998,80 @@
           <a:bodyPr rtlCol="0" anchor="ctr"/>
           <a:lstStyle/>
           <a:p>
-            <a:endParaRPr/>
-          </a:p>
-        </p:txBody>
-      </p:sp>
-      <p:sp>
-        <p:nvSpPr>
-          <p:cNvPr id="7" name="Oval 6"/>
+            <a:pPr algn="ctr"/>
+          </a:p>
+        </p:txBody>
+      </p:sp>
+      <p:sp>
+        <p:nvSpPr>
+          <p:cNvPr id="7" name="TextBox 6"/>
+          <p:cNvSpPr txBox="1"/>
+          <p:nvPr/>
+        </p:nvSpPr>
+        <p:spPr>
+          <a:xfrm>
+            <a:off x="987552" y="1508760"/>
+            <a:ext cx="6263640" cy="4160520"/>
+          </a:xfrm>
+          <a:prstGeom prst="rect">
+            <a:avLst/>
+          </a:prstGeom>
+          <a:noFill/>
+        </p:spPr>
+        <p:txBody>
+          <a:bodyPr wrap="square" lIns="0" rIns="0" tIns="0" bIns="0" anchor="t">
+            <a:spAutoFit/>
+          </a:bodyPr>
+          <a:lstStyle/>
+          <a:p>
+            <a:pPr algn="l">
+              <a:spcAft>
+                <a:spcPts val="600"/>
+              </a:spcAft>
+            </a:pPr>
+            <a:r>
+              <a:rPr sz="1500" b="1" i="0">
+                <a:solidFill>
+                  <a:srgbClr val="3F739B"/>
+                </a:solidFill>
+              </a:rPr>
+              <a:t>Example paragraph</a:t>
+            </a:r>
+            <a:endParaRPr sz="1500"/>
+          </a:p>
+          <a:p>
+            <a:pPr algn="l">
+              <a:lnSpc>
+                <a:spcPct val="106000"/>
+              </a:lnSpc>
+            </a:pPr>
+            <a:r>
+              <a:rPr sz="1700" b="0" i="0">
+                <a:solidFill>
+                  <a:srgbClr val="1F2A33"/>
+                </a:solidFill>
+              </a:rPr>
+              <a:t>Using data on 23 rich countries (Wilkinson and Pickett 2009), we regressed the percentage of people who say that most people can be trusted on income inequality (the ratio between the incomes of the richest and the poorest fifths) and on homicide rates. In a simple regression, countries with a one-unit higher inequality ratio had, on average, 6.5 percentage points lower trust. Holding homicide rates constant, the difference was 7.1 points, while homicide rates themselves added almost nothing (0.17 points per extra homicide per million). Together the two predictors accounted for 46% of the variation in trust between countries (R² = 0.46). The data describe countries rather than individuals, and the association alone cannot show which way the influence runs.</a:t>
+            </a:r>
+            <a:endParaRPr sz="1700"/>
+          </a:p>
+        </p:txBody>
+      </p:sp>
+      <p:sp>
+        <p:nvSpPr>
+          <p:cNvPr id="8" name="Rounded Rectangle 7"/>
           <p:cNvSpPr/>
           <p:nvPr/>
         </p:nvSpPr>
         <p:spPr>
           <a:xfrm>
-            <a:off x="987552" y="1645920"/>
-            <a:ext cx="566928" cy="566928"/>
-          </a:xfrm>
-          <a:prstGeom prst="ellipse">
-            <a:avLst/>
+            <a:off x="7635240" y="1371600"/>
+            <a:ext cx="3730752" cy="4434840"/>
+          </a:xfrm>
+          <a:prstGeom prst="roundRect">
+            <a:avLst>
+              <a:gd name="adj" fmla="val 8000"/>
+            </a:avLst>
           </a:prstGeom>
           <a:solidFill>
             <a:srgbClr val="1F394D"/>
@@ -31313,31 +33081,96 @@
           </a:ln>
         </p:spPr>
         <p:txBody>
-          <a:bodyPr lIns="0" tIns="0" rIns="0" bIns="0" rtlCol="0" anchor="ctr"/>
+          <a:bodyPr rtlCol="0" anchor="ctr"/>
           <a:lstStyle/>
           <a:p>
             <a:pPr algn="ctr"/>
-            <a:r>
-              <a:rPr sz="2000" b="1">
+          </a:p>
+        </p:txBody>
+      </p:sp>
+      <p:sp>
+        <p:nvSpPr>
+          <p:cNvPr id="9" name="TextBox 8"/>
+          <p:cNvSpPr txBox="1"/>
+          <p:nvPr/>
+        </p:nvSpPr>
+        <p:spPr>
+          <a:xfrm>
+            <a:off x="7863840" y="1508760"/>
+            <a:ext cx="3337560" cy="365760"/>
+          </a:xfrm>
+          <a:prstGeom prst="rect">
+            <a:avLst/>
+          </a:prstGeom>
+          <a:noFill/>
+        </p:spPr>
+        <p:txBody>
+          <a:bodyPr wrap="square" lIns="0" rIns="0" tIns="0" bIns="0" anchor="t">
+            <a:spAutoFit/>
+          </a:bodyPr>
+          <a:lstStyle/>
+          <a:p>
+            <a:pPr algn="l"/>
+            <a:r>
+              <a:rPr sz="1600" b="1" i="0">
+                <a:solidFill>
+                  <a:srgbClr val="B88C00"/>
+                </a:solidFill>
+              </a:rPr>
+              <a:t>Checklist</a:t>
+            </a:r>
+            <a:endParaRPr sz="1600"/>
+          </a:p>
+        </p:txBody>
+      </p:sp>
+      <p:sp>
+        <p:nvSpPr>
+          <p:cNvPr id="10" name="Oval 9"/>
+          <p:cNvSpPr/>
+          <p:nvPr/>
+        </p:nvSpPr>
+        <p:spPr>
+          <a:xfrm>
+            <a:off x="7882128" y="2057400"/>
+            <a:ext cx="365760" cy="365760"/>
+          </a:xfrm>
+          <a:prstGeom prst="ellipse">
+            <a:avLst/>
+          </a:prstGeom>
+          <a:solidFill>
+            <a:srgbClr val="B88C00"/>
+          </a:solidFill>
+          <a:ln>
+            <a:noFill/>
+          </a:ln>
+        </p:spPr>
+        <p:txBody>
+          <a:bodyPr rtlCol="0" anchor="ctr" wrap="square" lIns="0" rIns="0" tIns="18288" bIns="18288"/>
+          <a:lstStyle/>
+          <a:p>
+            <a:pPr algn="ctr"/>
+            <a:r>
+              <a:rPr sz="1400" b="1" i="0">
                 <a:solidFill>
                   <a:srgbClr val="FFFFFF"/>
                 </a:solidFill>
               </a:rPr>
               <a:t>1</a:t>
             </a:r>
-          </a:p>
-        </p:txBody>
-      </p:sp>
-      <p:sp>
-        <p:nvSpPr>
-          <p:cNvPr id="8" name="TextBox 7"/>
+            <a:endParaRPr sz="1400"/>
+          </a:p>
+        </p:txBody>
+      </p:sp>
+      <p:sp>
+        <p:nvSpPr>
+          <p:cNvPr id="11" name="TextBox 10"/>
           <p:cNvSpPr txBox="1"/>
           <p:nvPr/>
         </p:nvSpPr>
         <p:spPr>
           <a:xfrm>
-            <a:off x="1719072" y="1618488"/>
-            <a:ext cx="4023360" cy="640080"/>
+            <a:off x="8385048" y="2057400"/>
+            <a:ext cx="2880360" cy="384048"/>
           </a:xfrm>
           <a:prstGeom prst="rect">
             <a:avLst/>
@@ -31345,135 +33178,72 @@
           <a:noFill/>
         </p:spPr>
         <p:txBody>
-          <a:bodyPr wrap="square" lIns="0" tIns="0" rIns="0" bIns="0" anchor="ctr">
+          <a:bodyPr wrap="square" lIns="0" rIns="0" tIns="0" bIns="0" anchor="ctr">
             <a:spAutoFit/>
           </a:bodyPr>
           <a:lstStyle/>
           <a:p>
             <a:pPr algn="l"/>
             <a:r>
-              <a:rPr sz="2000" b="1" i="0">
+              <a:rPr sz="1500" b="0" i="0">
                 <a:solidFill>
-                  <a:srgbClr val="1F394D"/>
+                  <a:srgbClr val="FFFFFF"/>
                 </a:solidFill>
               </a:rPr>
-              <a:t>A line in real units</a:t>
-            </a:r>
-          </a:p>
-        </p:txBody>
-      </p:sp>
-      <p:sp>
-        <p:nvSpPr>
-          <p:cNvPr id="9" name="TextBox 8"/>
-          <p:cNvSpPr txBox="1"/>
-          <p:nvPr/>
-        </p:nvSpPr>
-        <p:spPr>
-          <a:xfrm>
-            <a:off x="1719072" y="2313432"/>
-            <a:ext cx="4023360" cy="1097279"/>
-          </a:xfrm>
-          <a:prstGeom prst="rect">
-            <a:avLst/>
-          </a:prstGeom>
-          <a:noFill/>
-        </p:spPr>
-        <p:txBody>
-          <a:bodyPr wrap="square" lIns="0" tIns="0" rIns="0" bIns="0" anchor="t">
-            <a:spAutoFit/>
-          </a:bodyPr>
-          <a:lstStyle/>
-          <a:p>
-            <a:pPr algn="l"/>
-            <a:r>
-              <a:rPr sz="1700" b="0" i="0">
-                <a:solidFill>
-                  <a:srgbClr val="1F2A33"/>
-                </a:solidFill>
-              </a:rPr>
-              <a:t>Slope = change in the outcome per one-unit change in the predictor.</a:t>
-            </a:r>
-          </a:p>
-        </p:txBody>
-      </p:sp>
-      <p:sp>
-        <p:nvSpPr>
-          <p:cNvPr id="10" name="Card 2"/>
+              <a:t>Outcome and predictors, with units</a:t>
+            </a:r>
+            <a:endParaRPr sz="1500"/>
+          </a:p>
+        </p:txBody>
+      </p:sp>
+      <p:sp>
+        <p:nvSpPr>
+          <p:cNvPr id="12" name="Oval 11"/>
           <p:cNvSpPr/>
           <p:nvPr/>
         </p:nvSpPr>
         <p:spPr>
           <a:xfrm>
-            <a:off x="6153912" y="1417320"/>
-            <a:ext cx="5212080" cy="2103120"/>
-          </a:xfrm>
-          <a:prstGeom prst="roundRect">
-            <a:avLst>
-              <a:gd name="adj" fmla="val 8000"/>
-            </a:avLst>
+            <a:off x="7882128" y="2660904"/>
+            <a:ext cx="365760" cy="365760"/>
+          </a:xfrm>
+          <a:prstGeom prst="ellipse">
+            <a:avLst/>
           </a:prstGeom>
           <a:solidFill>
-            <a:srgbClr val="EEF3F7"/>
+            <a:srgbClr val="B88C00"/>
           </a:solidFill>
           <a:ln>
             <a:noFill/>
           </a:ln>
         </p:spPr>
         <p:txBody>
-          <a:bodyPr rtlCol="0" anchor="ctr"/>
-          <a:lstStyle/>
-          <a:p>
-            <a:endParaRPr/>
-          </a:p>
-        </p:txBody>
-      </p:sp>
-      <p:sp>
-        <p:nvSpPr>
-          <p:cNvPr id="11" name="Oval 10"/>
-          <p:cNvSpPr/>
-          <p:nvPr/>
-        </p:nvSpPr>
-        <p:spPr>
-          <a:xfrm>
-            <a:off x="6382512" y="1645920"/>
-            <a:ext cx="566928" cy="566928"/>
-          </a:xfrm>
-          <a:prstGeom prst="ellipse">
-            <a:avLst/>
-          </a:prstGeom>
-          <a:solidFill>
-            <a:srgbClr val="1F394D"/>
-          </a:solidFill>
-          <a:ln>
-            <a:noFill/>
-          </a:ln>
-        </p:spPr>
-        <p:txBody>
-          <a:bodyPr lIns="0" tIns="0" rIns="0" bIns="0" rtlCol="0" anchor="ctr"/>
+          <a:bodyPr rtlCol="0" anchor="ctr" wrap="square" lIns="0" rIns="0" tIns="18288" bIns="18288"/>
           <a:lstStyle/>
           <a:p>
             <a:pPr algn="ctr"/>
             <a:r>
-              <a:rPr sz="2000" b="1">
+              <a:rPr sz="1400" b="1" i="0">
                 <a:solidFill>
                   <a:srgbClr val="FFFFFF"/>
                 </a:solidFill>
               </a:rPr>
               <a:t>2</a:t>
             </a:r>
-          </a:p>
-        </p:txBody>
-      </p:sp>
-      <p:sp>
-        <p:nvSpPr>
-          <p:cNvPr id="12" name="TextBox 11"/>
+            <a:endParaRPr sz="1400"/>
+          </a:p>
+        </p:txBody>
+      </p:sp>
+      <p:sp>
+        <p:nvSpPr>
+          <p:cNvPr id="13" name="TextBox 12"/>
           <p:cNvSpPr txBox="1"/>
           <p:nvPr/>
         </p:nvSpPr>
         <p:spPr>
           <a:xfrm>
-            <a:off x="7114032" y="1618488"/>
-            <a:ext cx="4023360" cy="640080"/>
+            <a:off x="8385048" y="2660904"/>
+            <a:ext cx="2880360" cy="384048"/>
           </a:xfrm>
           <a:prstGeom prst="rect">
             <a:avLst/>
@@ -31481,135 +33251,72 @@
           <a:noFill/>
         </p:spPr>
         <p:txBody>
-          <a:bodyPr wrap="square" lIns="0" tIns="0" rIns="0" bIns="0" anchor="ctr">
+          <a:bodyPr wrap="square" lIns="0" rIns="0" tIns="0" bIns="0" anchor="ctr">
             <a:spAutoFit/>
           </a:bodyPr>
           <a:lstStyle/>
           <a:p>
             <a:pPr algn="l"/>
             <a:r>
-              <a:rPr sz="2000" b="1" i="0">
+              <a:rPr sz="1500" b="0" i="0">
                 <a:solidFill>
-                  <a:srgbClr val="1F394D"/>
+                  <a:srgbClr val="FFFFFF"/>
                 </a:solidFill>
               </a:rPr>
-              <a:t>Residuals and R²</a:t>
-            </a:r>
-          </a:p>
-        </p:txBody>
-      </p:sp>
-      <p:sp>
-        <p:nvSpPr>
-          <p:cNvPr id="13" name="TextBox 12"/>
-          <p:cNvSpPr txBox="1"/>
-          <p:nvPr/>
-        </p:nvSpPr>
-        <p:spPr>
-          <a:xfrm>
-            <a:off x="7114032" y="2313432"/>
-            <a:ext cx="4023360" cy="1097279"/>
-          </a:xfrm>
-          <a:prstGeom prst="rect">
-            <a:avLst/>
-          </a:prstGeom>
-          <a:noFill/>
-        </p:spPr>
-        <p:txBody>
-          <a:bodyPr wrap="square" lIns="0" tIns="0" rIns="0" bIns="0" anchor="t">
-            <a:spAutoFit/>
-          </a:bodyPr>
-          <a:lstStyle/>
-          <a:p>
-            <a:pPr algn="l"/>
-            <a:r>
-              <a:rPr sz="1700" b="0" i="0">
-                <a:solidFill>
-                  <a:srgbClr val="1F2A33"/>
-                </a:solidFill>
-              </a:rPr>
-              <a:t>What the line gets wrong, and the share of variation it explains.</a:t>
-            </a:r>
-          </a:p>
-        </p:txBody>
-      </p:sp>
-      <p:sp>
-        <p:nvSpPr>
-          <p:cNvPr id="14" name="Card 3"/>
+              <a:t>The slope in words, in the outcome’s units</a:t>
+            </a:r>
+            <a:endParaRPr sz="1500"/>
+          </a:p>
+        </p:txBody>
+      </p:sp>
+      <p:sp>
+        <p:nvSpPr>
+          <p:cNvPr id="14" name="Oval 13"/>
           <p:cNvSpPr/>
           <p:nvPr/>
         </p:nvSpPr>
         <p:spPr>
           <a:xfrm>
-            <a:off x="758952" y="3749039"/>
-            <a:ext cx="5212080" cy="2103120"/>
-          </a:xfrm>
-          <a:prstGeom prst="roundRect">
-            <a:avLst>
-              <a:gd name="adj" fmla="val 8000"/>
-            </a:avLst>
+            <a:off x="7882128" y="3264408"/>
+            <a:ext cx="365760" cy="365760"/>
+          </a:xfrm>
+          <a:prstGeom prst="ellipse">
+            <a:avLst/>
           </a:prstGeom>
           <a:solidFill>
-            <a:srgbClr val="EEF3F7"/>
+            <a:srgbClr val="B88C00"/>
           </a:solidFill>
           <a:ln>
             <a:noFill/>
           </a:ln>
         </p:spPr>
         <p:txBody>
-          <a:bodyPr rtlCol="0" anchor="ctr"/>
-          <a:lstStyle/>
-          <a:p>
-            <a:endParaRPr/>
-          </a:p>
-        </p:txBody>
-      </p:sp>
-      <p:sp>
-        <p:nvSpPr>
-          <p:cNvPr id="15" name="Oval 14"/>
-          <p:cNvSpPr/>
-          <p:nvPr/>
-        </p:nvSpPr>
-        <p:spPr>
-          <a:xfrm>
-            <a:off x="987552" y="3977639"/>
-            <a:ext cx="566928" cy="566928"/>
-          </a:xfrm>
-          <a:prstGeom prst="ellipse">
-            <a:avLst/>
-          </a:prstGeom>
-          <a:solidFill>
-            <a:srgbClr val="1F394D"/>
-          </a:solidFill>
-          <a:ln>
-            <a:noFill/>
-          </a:ln>
-        </p:spPr>
-        <p:txBody>
-          <a:bodyPr lIns="0" tIns="0" rIns="0" bIns="0" rtlCol="0" anchor="ctr"/>
+          <a:bodyPr rtlCol="0" anchor="ctr" wrap="square" lIns="0" rIns="0" tIns="18288" bIns="18288"/>
           <a:lstStyle/>
           <a:p>
             <a:pPr algn="ctr"/>
             <a:r>
-              <a:rPr sz="2000" b="1">
+              <a:rPr sz="1400" b="1" i="0">
                 <a:solidFill>
                   <a:srgbClr val="FFFFFF"/>
                 </a:solidFill>
               </a:rPr>
               <a:t>3</a:t>
             </a:r>
-          </a:p>
-        </p:txBody>
-      </p:sp>
-      <p:sp>
-        <p:nvSpPr>
-          <p:cNvPr id="16" name="TextBox 15"/>
+            <a:endParaRPr sz="1400"/>
+          </a:p>
+        </p:txBody>
+      </p:sp>
+      <p:sp>
+        <p:nvSpPr>
+          <p:cNvPr id="15" name="TextBox 14"/>
           <p:cNvSpPr txBox="1"/>
           <p:nvPr/>
         </p:nvSpPr>
         <p:spPr>
           <a:xfrm>
-            <a:off x="1719072" y="3950207"/>
-            <a:ext cx="4023360" cy="640080"/>
+            <a:off x="8385048" y="3264408"/>
+            <a:ext cx="2880360" cy="384048"/>
           </a:xfrm>
           <a:prstGeom prst="rect">
             <a:avLst/>
@@ -31617,135 +33324,72 @@
           <a:noFill/>
         </p:spPr>
         <p:txBody>
-          <a:bodyPr wrap="square" lIns="0" tIns="0" rIns="0" bIns="0" anchor="ctr">
+          <a:bodyPr wrap="square" lIns="0" rIns="0" tIns="0" bIns="0" anchor="ctr">
             <a:spAutoFit/>
           </a:bodyPr>
           <a:lstStyle/>
           <a:p>
             <a:pPr algn="l"/>
             <a:r>
-              <a:rPr sz="2000" b="1" i="0">
+              <a:rPr sz="1500" b="0" i="0">
                 <a:solidFill>
-                  <a:srgbClr val="1F394D"/>
+                  <a:srgbClr val="FFFFFF"/>
                 </a:solidFill>
               </a:rPr>
-              <a:t>Adjusting, not controlling</a:t>
-            </a:r>
-          </a:p>
-        </p:txBody>
-      </p:sp>
-      <p:sp>
-        <p:nvSpPr>
-          <p:cNvPr id="17" name="TextBox 16"/>
-          <p:cNvSpPr txBox="1"/>
-          <p:nvPr/>
-        </p:nvSpPr>
-        <p:spPr>
-          <a:xfrm>
-            <a:off x="1719072" y="4645152"/>
-            <a:ext cx="4023360" cy="1097279"/>
-          </a:xfrm>
-          <a:prstGeom prst="rect">
-            <a:avLst/>
-          </a:prstGeom>
-          <a:noFill/>
-        </p:spPr>
-        <p:txBody>
-          <a:bodyPr wrap="square" lIns="0" tIns="0" rIns="0" bIns="0" anchor="t">
-            <a:spAutoFit/>
-          </a:bodyPr>
-          <a:lstStyle/>
-          <a:p>
-            <a:pPr algn="l"/>
-            <a:r>
-              <a:rPr sz="1700" b="0" i="0">
-                <a:solidFill>
-                  <a:srgbClr val="1F2A33"/>
-                </a:solidFill>
-              </a:rPr>
-              <a:t>Multiple regression compares like with like statistically, not experimentally.</a:t>
-            </a:r>
-          </a:p>
-        </p:txBody>
-      </p:sp>
-      <p:sp>
-        <p:nvSpPr>
-          <p:cNvPr id="18" name="Card 4"/>
+              <a:t>What is held constant</a:t>
+            </a:r>
+            <a:endParaRPr sz="1500"/>
+          </a:p>
+        </p:txBody>
+      </p:sp>
+      <p:sp>
+        <p:nvSpPr>
+          <p:cNvPr id="16" name="Oval 15"/>
           <p:cNvSpPr/>
           <p:nvPr/>
         </p:nvSpPr>
         <p:spPr>
           <a:xfrm>
-            <a:off x="6153912" y="3749039"/>
-            <a:ext cx="5212080" cy="2103120"/>
-          </a:xfrm>
-          <a:prstGeom prst="roundRect">
-            <a:avLst>
-              <a:gd name="adj" fmla="val 8000"/>
-            </a:avLst>
+            <a:off x="7882128" y="3867912"/>
+            <a:ext cx="365760" cy="365760"/>
+          </a:xfrm>
+          <a:prstGeom prst="ellipse">
+            <a:avLst/>
           </a:prstGeom>
           <a:solidFill>
-            <a:srgbClr val="EEF3F7"/>
+            <a:srgbClr val="B88C00"/>
           </a:solidFill>
           <a:ln>
             <a:noFill/>
           </a:ln>
         </p:spPr>
         <p:txBody>
-          <a:bodyPr rtlCol="0" anchor="ctr"/>
-          <a:lstStyle/>
-          <a:p>
-            <a:endParaRPr/>
-          </a:p>
-        </p:txBody>
-      </p:sp>
-      <p:sp>
-        <p:nvSpPr>
-          <p:cNvPr id="19" name="Oval 18"/>
-          <p:cNvSpPr/>
-          <p:nvPr/>
-        </p:nvSpPr>
-        <p:spPr>
-          <a:xfrm>
-            <a:off x="6382512" y="3977639"/>
-            <a:ext cx="566928" cy="566928"/>
-          </a:xfrm>
-          <a:prstGeom prst="ellipse">
-            <a:avLst/>
-          </a:prstGeom>
-          <a:solidFill>
-            <a:srgbClr val="1F394D"/>
-          </a:solidFill>
-          <a:ln>
-            <a:noFill/>
-          </a:ln>
-        </p:spPr>
-        <p:txBody>
-          <a:bodyPr lIns="0" tIns="0" rIns="0" bIns="0" rtlCol="0" anchor="ctr"/>
+          <a:bodyPr rtlCol="0" anchor="ctr" wrap="square" lIns="0" rIns="0" tIns="18288" bIns="18288"/>
           <a:lstStyle/>
           <a:p>
             <a:pPr algn="ctr"/>
             <a:r>
-              <a:rPr sz="2000" b="1">
+              <a:rPr sz="1400" b="1" i="0">
                 <a:solidFill>
                   <a:srgbClr val="FFFFFF"/>
                 </a:solidFill>
               </a:rPr>
               <a:t>4</a:t>
             </a:r>
-          </a:p>
-        </p:txBody>
-      </p:sp>
-      <p:sp>
-        <p:nvSpPr>
-          <p:cNvPr id="20" name="TextBox 19"/>
+            <a:endParaRPr sz="1400"/>
+          </a:p>
+        </p:txBody>
+      </p:sp>
+      <p:sp>
+        <p:nvSpPr>
+          <p:cNvPr id="17" name="TextBox 16"/>
           <p:cNvSpPr txBox="1"/>
           <p:nvPr/>
         </p:nvSpPr>
         <p:spPr>
           <a:xfrm>
-            <a:off x="7114032" y="3950207"/>
-            <a:ext cx="4023360" cy="640080"/>
+            <a:off x="8385048" y="3867912"/>
+            <a:ext cx="2880360" cy="384048"/>
           </a:xfrm>
           <a:prstGeom prst="rect">
             <a:avLst/>
@@ -31753,20 +33397,132 @@
           <a:noFill/>
         </p:spPr>
         <p:txBody>
-          <a:bodyPr wrap="square" lIns="0" tIns="0" rIns="0" bIns="0" anchor="ctr">
+          <a:bodyPr wrap="square" lIns="0" rIns="0" tIns="0" bIns="0" anchor="ctr">
             <a:spAutoFit/>
           </a:bodyPr>
           <a:lstStyle/>
           <a:p>
             <a:pPr algn="l"/>
             <a:r>
-              <a:rPr sz="2000" b="1" i="0">
+              <a:rPr sz="1500" b="0" i="0">
                 <a:solidFill>
-                  <a:srgbClr val="1F394D"/>
+                  <a:srgbClr val="FFFFFF"/>
                 </a:solidFill>
               </a:rPr>
-              <a:t>Categories are gaps</a:t>
-            </a:r>
+              <a:t>R²: the share of variation explained</a:t>
+            </a:r>
+            <a:endParaRPr sz="1500"/>
+          </a:p>
+        </p:txBody>
+      </p:sp>
+      <p:sp>
+        <p:nvSpPr>
+          <p:cNvPr id="18" name="Oval 17"/>
+          <p:cNvSpPr/>
+          <p:nvPr/>
+        </p:nvSpPr>
+        <p:spPr>
+          <a:xfrm>
+            <a:off x="7882128" y="4471416"/>
+            <a:ext cx="365760" cy="365760"/>
+          </a:xfrm>
+          <a:prstGeom prst="ellipse">
+            <a:avLst/>
+          </a:prstGeom>
+          <a:solidFill>
+            <a:srgbClr val="B88C00"/>
+          </a:solidFill>
+          <a:ln>
+            <a:noFill/>
+          </a:ln>
+        </p:spPr>
+        <p:txBody>
+          <a:bodyPr rtlCol="0" anchor="ctr" wrap="square" lIns="0" rIns="0" tIns="18288" bIns="18288"/>
+          <a:lstStyle/>
+          <a:p>
+            <a:pPr algn="ctr"/>
+            <a:r>
+              <a:rPr sz="1400" b="1" i="0">
+                <a:solidFill>
+                  <a:srgbClr val="FFFFFF"/>
+                </a:solidFill>
+              </a:rPr>
+              <a:t>5</a:t>
+            </a:r>
+            <a:endParaRPr sz="1400"/>
+          </a:p>
+        </p:txBody>
+      </p:sp>
+      <p:sp>
+        <p:nvSpPr>
+          <p:cNvPr id="19" name="TextBox 18"/>
+          <p:cNvSpPr txBox="1"/>
+          <p:nvPr/>
+        </p:nvSpPr>
+        <p:spPr>
+          <a:xfrm>
+            <a:off x="8385048" y="4471416"/>
+            <a:ext cx="2880360" cy="384048"/>
+          </a:xfrm>
+          <a:prstGeom prst="rect">
+            <a:avLst/>
+          </a:prstGeom>
+          <a:noFill/>
+        </p:spPr>
+        <p:txBody>
+          <a:bodyPr wrap="square" lIns="0" rIns="0" tIns="0" bIns="0" anchor="ctr">
+            <a:spAutoFit/>
+          </a:bodyPr>
+          <a:lstStyle/>
+          <a:p>
+            <a:pPr algn="l"/>
+            <a:r>
+              <a:rPr sz="1500" b="0" i="0">
+                <a:solidFill>
+                  <a:srgbClr val="FFFFFF"/>
+                </a:solidFill>
+              </a:rPr>
+              <a:t>The cases and the range of the data</a:t>
+            </a:r>
+            <a:endParaRPr sz="1500"/>
+          </a:p>
+        </p:txBody>
+      </p:sp>
+      <p:sp>
+        <p:nvSpPr>
+          <p:cNvPr id="20" name="Oval 19"/>
+          <p:cNvSpPr/>
+          <p:nvPr/>
+        </p:nvSpPr>
+        <p:spPr>
+          <a:xfrm>
+            <a:off x="7882128" y="5074920"/>
+            <a:ext cx="365760" cy="365760"/>
+          </a:xfrm>
+          <a:prstGeom prst="ellipse">
+            <a:avLst/>
+          </a:prstGeom>
+          <a:solidFill>
+            <a:srgbClr val="B88C00"/>
+          </a:solidFill>
+          <a:ln>
+            <a:noFill/>
+          </a:ln>
+        </p:spPr>
+        <p:txBody>
+          <a:bodyPr rtlCol="0" anchor="ctr" wrap="square" lIns="0" rIns="0" tIns="18288" bIns="18288"/>
+          <a:lstStyle/>
+          <a:p>
+            <a:pPr algn="ctr"/>
+            <a:r>
+              <a:rPr sz="1400" b="1" i="0">
+                <a:solidFill>
+                  <a:srgbClr val="FFFFFF"/>
+                </a:solidFill>
+              </a:rPr>
+              <a:t>6</a:t>
+            </a:r>
+            <a:endParaRPr sz="1400"/>
           </a:p>
         </p:txBody>
       </p:sp>
@@ -31778,8 +33534,8 @@
         </p:nvSpPr>
         <p:spPr>
           <a:xfrm>
-            <a:off x="7114032" y="4645152"/>
-            <a:ext cx="4023360" cy="1097279"/>
+            <a:off x="8385048" y="5074920"/>
+            <a:ext cx="2880360" cy="384048"/>
           </a:xfrm>
           <a:prstGeom prst="rect">
             <a:avLst/>
@@ -31787,20 +33543,56 @@
           <a:noFill/>
         </p:spPr>
         <p:txBody>
-          <a:bodyPr wrap="square" lIns="0" tIns="0" rIns="0" bIns="0" anchor="t">
+          <a:bodyPr wrap="square" lIns="0" rIns="0" tIns="0" bIns="0" anchor="ctr">
             <a:spAutoFit/>
           </a:bodyPr>
           <a:lstStyle/>
           <a:p>
             <a:pPr algn="l"/>
             <a:r>
-              <a:rPr sz="1700" b="0" i="0">
+              <a:rPr sz="1500" b="0" i="0">
                 <a:solidFill>
-                  <a:srgbClr val="1F2A33"/>
+                  <a:srgbClr val="FFFFFF"/>
                 </a:solidFill>
               </a:rPr>
-              <a:t>Each category’s coefficient is its difference from the reference group.</a:t>
-            </a:r>
+              <a:t>Association, not cause</a:t>
+            </a:r>
+            <a:endParaRPr sz="1500"/>
+          </a:p>
+        </p:txBody>
+      </p:sp>
+      <p:sp>
+        <p:nvSpPr>
+          <p:cNvPr id="22" name="TextBox 21"/>
+          <p:cNvSpPr txBox="1"/>
+          <p:nvPr/>
+        </p:nvSpPr>
+        <p:spPr>
+          <a:xfrm>
+            <a:off x="758952" y="5943600"/>
+            <a:ext cx="10607040" cy="292608"/>
+          </a:xfrm>
+          <a:prstGeom prst="rect">
+            <a:avLst/>
+          </a:prstGeom>
+          <a:noFill/>
+        </p:spPr>
+        <p:txBody>
+          <a:bodyPr wrap="square" lIns="0" rIns="0" tIns="0" bIns="0" anchor="ctr">
+            <a:spAutoFit/>
+          </a:bodyPr>
+          <a:lstStyle/>
+          <a:p>
+            <a:pPr algn="l"/>
+            <a:r>
+              <a:rPr sz="1200" b="0" i="0">
+                <a:solidFill>
+                  <a:srgbClr val="55606B"/>
+                </a:solidFill>
+              </a:rPr>
+              <a:t>Data: pickett2009.csv (Wilkinson &amp; Pickett 2009), 23 countries; models with income inequality alone and with homicide rates.</a:t>
+            </a:r>
+            <a:endParaRPr sz="1200"/>
           </a:p>
         </p:txBody>
       </p:sp>
@@ -32529,6 +34321,1316 @@
 </file>
 
 <file path=ppt/slides/slide30.xml><?xml version="1.0" encoding="utf-8"?>
+<p:sld xmlns:a="http://schemas.openxmlformats.org/drawingml/2006/main" xmlns:p="http://schemas.openxmlformats.org/presentationml/2006/main" xmlns:r="http://schemas.openxmlformats.org/officeDocument/2006/relationships">
+  <p:cSld>
+    <p:spTree>
+      <p:nvGrpSpPr>
+        <p:cNvPr id="1" name=""/>
+        <p:cNvGrpSpPr/>
+        <p:nvPr/>
+      </p:nvGrpSpPr>
+      <p:grpSpPr/>
+      <p:sp>
+        <p:nvSpPr>
+          <p:cNvPr id="2" name="Title 1"/>
+          <p:cNvSpPr>
+            <a:spLocks noGrp="1"/>
+          </p:cNvSpPr>
+          <p:nvPr>
+            <p:ph type="title"/>
+          </p:nvPr>
+        </p:nvSpPr>
+        <p:spPr/>
+        <p:txBody>
+          <a:bodyPr/>
+          <a:lstStyle/>
+          <a:p>
+            <a:r>
+              <a:t>Interactive explorer</a:t>
+            </a:r>
+          </a:p>
+        </p:txBody>
+      </p:sp>
+      <p:sp>
+        <p:nvSpPr>
+          <p:cNvPr id="3" name="Date Placeholder 2">
+            <a:extLst>
+              <a:ext uri="{FF2B5EF4-FFF2-40B4-BE49-F238E27FC236}">
+                <a16:creationId xmlns:a16="http://schemas.microsoft.com/office/drawing/2014/main" id="{A2D68425-0661-96D9-7968-6D84B2193400}"/>
+              </a:ext>
+            </a:extLst>
+          </p:cNvPr>
+          <p:cNvSpPr>
+            <a:spLocks noGrp="1"/>
+          </p:cNvSpPr>
+          <p:nvPr>
+            <p:ph type="dt" sz="half" idx="10"/>
+          </p:nvPr>
+        </p:nvSpPr>
+        <p:spPr/>
+        <p:txBody>
+          <a:bodyPr/>
+          <a:lstStyle/>
+          <a:p>
+            <a:fld id="{F1080D8F-B607-47BB-96CB-8638525C1338}" type="datetime3">
+              <a:rPr lang="en-GB"/>
+              <a:t>13 October, 2026</a:t>
+            </a:fld>
+            <a:endParaRPr lang="en-GB"/>
+          </a:p>
+        </p:txBody>
+      </p:sp>
+      <p:sp>
+        <p:nvSpPr>
+          <p:cNvPr id="4" name="Footer Placeholder 3">
+            <a:extLst>
+              <a:ext uri="{FF2B5EF4-FFF2-40B4-BE49-F238E27FC236}">
+                <a16:creationId xmlns:a16="http://schemas.microsoft.com/office/drawing/2014/main" id="{3B094F2C-CF60-62B4-F1A2-1FA4B8ED3A21}"/>
+              </a:ext>
+            </a:extLst>
+          </p:cNvPr>
+          <p:cNvSpPr>
+            <a:spLocks noGrp="1"/>
+          </p:cNvSpPr>
+          <p:nvPr>
+            <p:ph type="ftr" sz="quarter" idx="11"/>
+          </p:nvPr>
+        </p:nvSpPr>
+        <p:spPr/>
+        <p:txBody>
+          <a:bodyPr/>
+          <a:lstStyle/>
+          <a:p>
+            <a:r>
+              <a:rPr lang="en-GB"/>
+              <a:t>Modelling continuous outcomes</a:t>
+            </a:r>
+          </a:p>
+        </p:txBody>
+      </p:sp>
+      <p:sp>
+        <p:nvSpPr>
+          <p:cNvPr id="5" name="Slide Number Placeholder 4">
+            <a:extLst>
+              <a:ext uri="{FF2B5EF4-FFF2-40B4-BE49-F238E27FC236}">
+                <a16:creationId xmlns:a16="http://schemas.microsoft.com/office/drawing/2014/main" id="{19153079-52E8-3CBE-35A8-A200B180E5C2}"/>
+              </a:ext>
+            </a:extLst>
+          </p:cNvPr>
+          <p:cNvSpPr>
+            <a:spLocks noGrp="1"/>
+          </p:cNvSpPr>
+          <p:nvPr>
+            <p:ph type="sldNum" sz="quarter" idx="12"/>
+          </p:nvPr>
+        </p:nvSpPr>
+        <p:spPr/>
+        <p:txBody>
+          <a:bodyPr/>
+          <a:lstStyle/>
+          <a:p>
+            <a:fld id="{9FAA51BB-2FC0-4DB8-B50E-F52D50E733B6}" type="slidenum">
+              <a:rPr lang="en-GB" smtClean="0"/>
+              <a:t>28</a:t>
+            </a:fld>
+            <a:endParaRPr lang="en-GB"/>
+          </a:p>
+        </p:txBody>
+      </p:sp>
+      <p:pic>
+        <p:nvPicPr>
+          <p:cNvPr id="6" name="Picture 5" descr="qr_w3.png"/>
+          <p:cNvPicPr>
+            <a:picLocks noChangeAspect="1"/>
+          </p:cNvPicPr>
+          <p:nvPr/>
+        </p:nvPicPr>
+        <p:blipFill>
+          <a:blip r:embed="rId2"/>
+          <a:stretch>
+            <a:fillRect/>
+          </a:stretch>
+        </p:blipFill>
+        <p:spPr>
+          <a:xfrm>
+            <a:off x="1051560" y="1463040"/>
+            <a:ext cx="2834640" cy="2834640"/>
+          </a:xfrm>
+          <a:prstGeom prst="rect">
+            <a:avLst/>
+          </a:prstGeom>
+        </p:spPr>
+      </p:pic>
+      <p:sp>
+        <p:nvSpPr>
+          <p:cNvPr id="7" name="TextBox 6"/>
+          <p:cNvSpPr txBox="1"/>
+          <p:nvPr/>
+        </p:nvSpPr>
+        <p:spPr>
+          <a:xfrm>
+            <a:off x="758952" y="4434840"/>
+            <a:ext cx="3429000" cy="1097280"/>
+          </a:xfrm>
+          <a:prstGeom prst="rect">
+            <a:avLst/>
+          </a:prstGeom>
+          <a:noFill/>
+        </p:spPr>
+        <p:txBody>
+          <a:bodyPr wrap="square" lIns="0" rIns="0" tIns="0" bIns="0" anchor="t">
+            <a:spAutoFit/>
+          </a:bodyPr>
+          <a:lstStyle/>
+          <a:p>
+            <a:pPr algn="ctr">
+              <a:spcAft>
+                <a:spcPts val="400"/>
+              </a:spcAft>
+            </a:pPr>
+            <a:r>
+              <a:rPr sz="1400" b="1" i="0">
+                <a:solidFill>
+                  <a:srgbClr val="1F394D"/>
+                </a:solidFill>
+              </a:rPr>
+              <a:t>Course site › [W3] Interactive Explorer</a:t>
+            </a:r>
+            <a:endParaRPr sz="1400"/>
+          </a:p>
+          <a:p>
+            <a:pPr algn="ctr"/>
+            <a:r>
+              <a:rPr sz="1200" b="0" i="0">
+                <a:solidFill>
+                  <a:srgbClr val="55606B"/>
+                </a:solidFill>
+              </a:rPr>
+              <a:t>cgmoreh.github.io/SOC2069-QUANT-26</a:t>
+            </a:r>
+            <a:endParaRPr sz="1200"/>
+          </a:p>
+        </p:txBody>
+      </p:sp>
+      <p:sp>
+        <p:nvSpPr>
+          <p:cNvPr id="8" name="Rounded Rectangle 7"/>
+          <p:cNvSpPr/>
+          <p:nvPr/>
+        </p:nvSpPr>
+        <p:spPr>
+          <a:xfrm>
+            <a:off x="4526280" y="1417320"/>
+            <a:ext cx="6839712" cy="1097280"/>
+          </a:xfrm>
+          <a:prstGeom prst="roundRect">
+            <a:avLst>
+              <a:gd name="adj" fmla="val 8000"/>
+            </a:avLst>
+          </a:prstGeom>
+          <a:solidFill>
+            <a:srgbClr val="EEF3F7"/>
+          </a:solidFill>
+          <a:ln>
+            <a:noFill/>
+          </a:ln>
+        </p:spPr>
+        <p:txBody>
+          <a:bodyPr rtlCol="0" anchor="ctr"/>
+          <a:lstStyle/>
+          <a:p>
+            <a:pPr algn="ctr"/>
+          </a:p>
+        </p:txBody>
+      </p:sp>
+      <p:sp>
+        <p:nvSpPr>
+          <p:cNvPr id="9" name="Oval 8"/>
+          <p:cNvSpPr/>
+          <p:nvPr/>
+        </p:nvSpPr>
+        <p:spPr>
+          <a:xfrm>
+            <a:off x="4732020" y="1714500"/>
+            <a:ext cx="502920" cy="502920"/>
+          </a:xfrm>
+          <a:prstGeom prst="ellipse">
+            <a:avLst/>
+          </a:prstGeom>
+          <a:solidFill>
+            <a:srgbClr val="1F394D"/>
+          </a:solidFill>
+          <a:ln>
+            <a:noFill/>
+          </a:ln>
+        </p:spPr>
+        <p:txBody>
+          <a:bodyPr rtlCol="0" anchor="ctr" wrap="square" lIns="0" rIns="0" tIns="18288" bIns="18288"/>
+          <a:lstStyle/>
+          <a:p>
+            <a:pPr algn="ctr"/>
+            <a:r>
+              <a:rPr sz="1800" b="1" i="0">
+                <a:solidFill>
+                  <a:srgbClr val="FFFFFF"/>
+                </a:solidFill>
+              </a:rPr>
+              <a:t>1</a:t>
+            </a:r>
+            <a:endParaRPr sz="1800"/>
+          </a:p>
+        </p:txBody>
+      </p:sp>
+      <p:sp>
+        <p:nvSpPr>
+          <p:cNvPr id="10" name="TextBox 9"/>
+          <p:cNvSpPr txBox="1"/>
+          <p:nvPr/>
+        </p:nvSpPr>
+        <p:spPr>
+          <a:xfrm>
+            <a:off x="5440680" y="1527048"/>
+            <a:ext cx="5760720" cy="877824"/>
+          </a:xfrm>
+          <a:prstGeom prst="rect">
+            <a:avLst/>
+          </a:prstGeom>
+          <a:noFill/>
+        </p:spPr>
+        <p:txBody>
+          <a:bodyPr wrap="square" lIns="0" rIns="0" tIns="0" bIns="0" anchor="ctr">
+            <a:spAutoFit/>
+          </a:bodyPr>
+          <a:lstStyle/>
+          <a:p>
+            <a:pPr algn="l">
+              <a:spcAft>
+                <a:spcPts val="200"/>
+              </a:spcAft>
+            </a:pPr>
+            <a:r>
+              <a:rPr sz="1800" b="1" i="0">
+                <a:solidFill>
+                  <a:srgbClr val="1F394D"/>
+                </a:solidFill>
+              </a:rPr>
+              <a:t>Fit the line yourself</a:t>
+            </a:r>
+            <a:endParaRPr sz="1800"/>
+          </a:p>
+          <a:p>
+            <a:pPr algn="l"/>
+            <a:r>
+              <a:rPr sz="1500" b="0" i="0">
+                <a:solidFill>
+                  <a:srgbClr val="1F2A33"/>
+                </a:solidFill>
+              </a:rPr>
+              <a:t>Move the intercept and slope to make the squared residuals as small as you can, then compare with the least-squares line.</a:t>
+            </a:r>
+            <a:endParaRPr sz="1500"/>
+          </a:p>
+        </p:txBody>
+      </p:sp>
+      <p:sp>
+        <p:nvSpPr>
+          <p:cNvPr id="11" name="Rounded Rectangle 10"/>
+          <p:cNvSpPr/>
+          <p:nvPr/>
+        </p:nvSpPr>
+        <p:spPr>
+          <a:xfrm>
+            <a:off x="4526280" y="2651760"/>
+            <a:ext cx="6839712" cy="1097280"/>
+          </a:xfrm>
+          <a:prstGeom prst="roundRect">
+            <a:avLst>
+              <a:gd name="adj" fmla="val 8000"/>
+            </a:avLst>
+          </a:prstGeom>
+          <a:solidFill>
+            <a:srgbClr val="EEF3F7"/>
+          </a:solidFill>
+          <a:ln>
+            <a:noFill/>
+          </a:ln>
+        </p:spPr>
+        <p:txBody>
+          <a:bodyPr rtlCol="0" anchor="ctr"/>
+          <a:lstStyle/>
+          <a:p>
+            <a:pPr algn="ctr"/>
+          </a:p>
+        </p:txBody>
+      </p:sp>
+      <p:sp>
+        <p:nvSpPr>
+          <p:cNvPr id="12" name="Oval 11"/>
+          <p:cNvSpPr/>
+          <p:nvPr/>
+        </p:nvSpPr>
+        <p:spPr>
+          <a:xfrm>
+            <a:off x="4732020" y="2948940"/>
+            <a:ext cx="502920" cy="502920"/>
+          </a:xfrm>
+          <a:prstGeom prst="ellipse">
+            <a:avLst/>
+          </a:prstGeom>
+          <a:solidFill>
+            <a:srgbClr val="1F394D"/>
+          </a:solidFill>
+          <a:ln>
+            <a:noFill/>
+          </a:ln>
+        </p:spPr>
+        <p:txBody>
+          <a:bodyPr rtlCol="0" anchor="ctr" wrap="square" lIns="0" rIns="0" tIns="18288" bIns="18288"/>
+          <a:lstStyle/>
+          <a:p>
+            <a:pPr algn="ctr"/>
+            <a:r>
+              <a:rPr sz="1800" b="1" i="0">
+                <a:solidFill>
+                  <a:srgbClr val="FFFFFF"/>
+                </a:solidFill>
+              </a:rPr>
+              <a:t>2</a:t>
+            </a:r>
+            <a:endParaRPr sz="1800"/>
+          </a:p>
+        </p:txBody>
+      </p:sp>
+      <p:sp>
+        <p:nvSpPr>
+          <p:cNvPr id="13" name="TextBox 12"/>
+          <p:cNvSpPr txBox="1"/>
+          <p:nvPr/>
+        </p:nvSpPr>
+        <p:spPr>
+          <a:xfrm>
+            <a:off x="5440680" y="2761488"/>
+            <a:ext cx="5760720" cy="877824"/>
+          </a:xfrm>
+          <a:prstGeom prst="rect">
+            <a:avLst/>
+          </a:prstGeom>
+          <a:noFill/>
+        </p:spPr>
+        <p:txBody>
+          <a:bodyPr wrap="square" lIns="0" rIns="0" tIns="0" bIns="0" anchor="ctr">
+            <a:spAutoFit/>
+          </a:bodyPr>
+          <a:lstStyle/>
+          <a:p>
+            <a:pPr algn="l">
+              <a:spcAft>
+                <a:spcPts val="200"/>
+              </a:spcAft>
+            </a:pPr>
+            <a:r>
+              <a:rPr sz="1800" b="1" i="0">
+                <a:solidFill>
+                  <a:srgbClr val="1F394D"/>
+                </a:solidFill>
+              </a:rPr>
+              <a:t>Add a country</a:t>
+            </a:r>
+            <a:endParaRPr sz="1800"/>
+          </a:p>
+          <a:p>
+            <a:pPr algn="l"/>
+            <a:r>
+              <a:rPr sz="1500" b="0" i="0">
+                <a:solidFill>
+                  <a:srgbClr val="1F2A33"/>
+                </a:solidFill>
+              </a:rPr>
+              <a:t>Place an extra country anywhere and watch how far one point can pull the line and change R².</a:t>
+            </a:r>
+            <a:endParaRPr sz="1500"/>
+          </a:p>
+        </p:txBody>
+      </p:sp>
+      <p:sp>
+        <p:nvSpPr>
+          <p:cNvPr id="14" name="Rounded Rectangle 13"/>
+          <p:cNvSpPr/>
+          <p:nvPr/>
+        </p:nvSpPr>
+        <p:spPr>
+          <a:xfrm>
+            <a:off x="4526280" y="3886200"/>
+            <a:ext cx="6839712" cy="1097280"/>
+          </a:xfrm>
+          <a:prstGeom prst="roundRect">
+            <a:avLst>
+              <a:gd name="adj" fmla="val 8000"/>
+            </a:avLst>
+          </a:prstGeom>
+          <a:solidFill>
+            <a:srgbClr val="EEF3F7"/>
+          </a:solidFill>
+          <a:ln>
+            <a:noFill/>
+          </a:ln>
+        </p:spPr>
+        <p:txBody>
+          <a:bodyPr rtlCol="0" anchor="ctr"/>
+          <a:lstStyle/>
+          <a:p>
+            <a:pPr algn="ctr"/>
+          </a:p>
+        </p:txBody>
+      </p:sp>
+      <p:sp>
+        <p:nvSpPr>
+          <p:cNvPr id="15" name="Oval 14"/>
+          <p:cNvSpPr/>
+          <p:nvPr/>
+        </p:nvSpPr>
+        <p:spPr>
+          <a:xfrm>
+            <a:off x="4732020" y="4183379"/>
+            <a:ext cx="502920" cy="502920"/>
+          </a:xfrm>
+          <a:prstGeom prst="ellipse">
+            <a:avLst/>
+          </a:prstGeom>
+          <a:solidFill>
+            <a:srgbClr val="1F394D"/>
+          </a:solidFill>
+          <a:ln>
+            <a:noFill/>
+          </a:ln>
+        </p:spPr>
+        <p:txBody>
+          <a:bodyPr rtlCol="0" anchor="ctr" wrap="square" lIns="0" rIns="0" tIns="18288" bIns="18288"/>
+          <a:lstStyle/>
+          <a:p>
+            <a:pPr algn="ctr"/>
+            <a:r>
+              <a:rPr sz="1800" b="1" i="0">
+                <a:solidFill>
+                  <a:srgbClr val="FFFFFF"/>
+                </a:solidFill>
+              </a:rPr>
+              <a:t>3</a:t>
+            </a:r>
+            <a:endParaRPr sz="1800"/>
+          </a:p>
+        </p:txBody>
+      </p:sp>
+      <p:sp>
+        <p:nvSpPr>
+          <p:cNvPr id="16" name="TextBox 15"/>
+          <p:cNvSpPr txBox="1"/>
+          <p:nvPr/>
+        </p:nvSpPr>
+        <p:spPr>
+          <a:xfrm>
+            <a:off x="5440680" y="3995928"/>
+            <a:ext cx="5760720" cy="877824"/>
+          </a:xfrm>
+          <a:prstGeom prst="rect">
+            <a:avLst/>
+          </a:prstGeom>
+          <a:noFill/>
+        </p:spPr>
+        <p:txBody>
+          <a:bodyPr wrap="square" lIns="0" rIns="0" tIns="0" bIns="0" anchor="ctr">
+            <a:spAutoFit/>
+          </a:bodyPr>
+          <a:lstStyle/>
+          <a:p>
+            <a:pPr algn="l">
+              <a:spcAft>
+                <a:spcPts val="200"/>
+              </a:spcAft>
+            </a:pPr>
+            <a:r>
+              <a:rPr sz="1800" b="1" i="0">
+                <a:solidFill>
+                  <a:srgbClr val="1F394D"/>
+                </a:solidFill>
+              </a:rPr>
+              <a:t>Predictions and residuals</a:t>
+            </a:r>
+            <a:endParaRPr sz="1800"/>
+          </a:p>
+          <a:p>
+            <a:pPr algn="l"/>
+            <a:r>
+              <a:rPr sz="1500" b="0" i="0">
+                <a:solidFill>
+                  <a:srgbClr val="1F2A33"/>
+                </a:solidFill>
+              </a:rPr>
+              <a:t>Pick a country and compare its predicted and observed trust.</a:t>
+            </a:r>
+            <a:endParaRPr sz="1500"/>
+          </a:p>
+        </p:txBody>
+      </p:sp>
+      <p:sp>
+        <p:nvSpPr>
+          <p:cNvPr id="17" name="Rounded Rectangle 16"/>
+          <p:cNvSpPr/>
+          <p:nvPr/>
+        </p:nvSpPr>
+        <p:spPr>
+          <a:xfrm>
+            <a:off x="4526280" y="5120640"/>
+            <a:ext cx="6839712" cy="731520"/>
+          </a:xfrm>
+          <a:prstGeom prst="roundRect">
+            <a:avLst>
+              <a:gd name="adj" fmla="val 8000"/>
+            </a:avLst>
+          </a:prstGeom>
+          <a:solidFill>
+            <a:srgbClr val="1F394D"/>
+          </a:solidFill>
+          <a:ln>
+            <a:noFill/>
+          </a:ln>
+        </p:spPr>
+        <p:txBody>
+          <a:bodyPr rtlCol="0" anchor="ctr"/>
+          <a:lstStyle/>
+          <a:p>
+            <a:pPr algn="ctr"/>
+          </a:p>
+        </p:txBody>
+      </p:sp>
+      <p:sp>
+        <p:nvSpPr>
+          <p:cNvPr id="18" name="TextBox 17"/>
+          <p:cNvSpPr txBox="1"/>
+          <p:nvPr/>
+        </p:nvSpPr>
+        <p:spPr>
+          <a:xfrm>
+            <a:off x="4754880" y="5120640"/>
+            <a:ext cx="6400800" cy="731520"/>
+          </a:xfrm>
+          <a:prstGeom prst="rect">
+            <a:avLst/>
+          </a:prstGeom>
+          <a:noFill/>
+        </p:spPr>
+        <p:txBody>
+          <a:bodyPr wrap="square" lIns="0" rIns="0" tIns="0" bIns="0" anchor="ctr">
+            <a:spAutoFit/>
+          </a:bodyPr>
+          <a:lstStyle/>
+          <a:p>
+            <a:pPr algn="l"/>
+            <a:r>
+              <a:rPr sz="1500" b="1" i="0">
+                <a:solidFill>
+                  <a:srgbClr val="B88C00"/>
+                </a:solidFill>
+              </a:rPr>
+              <a:t>Also on the page: </a:t>
+            </a:r>
+            <a:r>
+              <a:rPr sz="1500" b="0" i="0">
+                <a:solidFill>
+                  <a:srgbClr val="FFFFFF"/>
+                </a:solidFill>
+              </a:rPr>
+              <a:t>the Spirit Level data from the lecture and Worksheet 3, with the axes starting at 0</a:t>
+            </a:r>
+            <a:endParaRPr sz="1500"/>
+          </a:p>
+        </p:txBody>
+      </p:sp>
+    </p:spTree>
+  </p:cSld>
+  <p:clrMapOvr>
+    <a:masterClrMapping/>
+  </p:clrMapOvr>
+</p:sld>
+</file>
+
+<file path=ppt/slides/slide31.xml><?xml version="1.0" encoding="utf-8"?>
+<p:sld xmlns:a="http://schemas.openxmlformats.org/drawingml/2006/main" xmlns:r="http://schemas.openxmlformats.org/officeDocument/2006/relationships" xmlns:p="http://schemas.openxmlformats.org/presentationml/2006/main">
+  <p:cSld>
+    <p:spTree>
+      <p:nvGrpSpPr>
+        <p:cNvPr id="1" name=""/>
+        <p:cNvGrpSpPr/>
+        <p:nvPr/>
+      </p:nvGrpSpPr>
+      <p:grpSpPr>
+        <a:xfrm>
+          <a:off x="0" y="0"/>
+          <a:ext cx="0" cy="0"/>
+          <a:chOff x="0" y="0"/>
+          <a:chExt cx="0" cy="0"/>
+        </a:xfrm>
+      </p:grpSpPr>
+      <p:sp>
+        <p:nvSpPr>
+          <p:cNvPr id="2" name="Title 1"/>
+          <p:cNvSpPr>
+            <a:spLocks noGrp="1"/>
+          </p:cNvSpPr>
+          <p:nvPr>
+            <p:ph type="title"/>
+          </p:nvPr>
+        </p:nvSpPr>
+        <p:spPr/>
+        <p:txBody>
+          <a:bodyPr/>
+          <a:lstStyle/>
+          <a:p>
+            <a:r>
+              <a:t>Key takeaways</a:t>
+            </a:r>
+          </a:p>
+        </p:txBody>
+      </p:sp>
+      <p:sp>
+        <p:nvSpPr>
+          <p:cNvPr id="3" name="Date Placeholder 2">
+            <a:extLst>
+              <a:ext uri="{FF2B5EF4-FFF2-40B4-BE49-F238E27FC236}">
+                <a16:creationId xmlns:a16="http://schemas.microsoft.com/office/drawing/2014/main" id="{A2D68425-0661-96D9-7968-6D84B2193400}"/>
+              </a:ext>
+            </a:extLst>
+          </p:cNvPr>
+          <p:cNvSpPr>
+            <a:spLocks noGrp="1"/>
+          </p:cNvSpPr>
+          <p:nvPr>
+            <p:ph type="dt" sz="half" idx="10"/>
+          </p:nvPr>
+        </p:nvSpPr>
+        <p:spPr/>
+        <p:txBody>
+          <a:bodyPr/>
+          <a:lstStyle/>
+          <a:p>
+            <a:fld id="{F1080D8F-B607-47BB-96CB-8638525C1338}" type="datetime3">
+              <a:rPr lang="en-GB"/>
+              <a:t>13 October, 2026</a:t>
+            </a:fld>
+            <a:endParaRPr lang="en-GB"/>
+          </a:p>
+        </p:txBody>
+      </p:sp>
+      <p:sp>
+        <p:nvSpPr>
+          <p:cNvPr id="4" name="Footer Placeholder 3">
+            <a:extLst>
+              <a:ext uri="{FF2B5EF4-FFF2-40B4-BE49-F238E27FC236}">
+                <a16:creationId xmlns:a16="http://schemas.microsoft.com/office/drawing/2014/main" id="{3B094F2C-CF60-62B4-F1A2-1FA4B8ED3A21}"/>
+              </a:ext>
+            </a:extLst>
+          </p:cNvPr>
+          <p:cNvSpPr>
+            <a:spLocks noGrp="1"/>
+          </p:cNvSpPr>
+          <p:nvPr>
+            <p:ph type="ftr" sz="quarter" idx="11"/>
+          </p:nvPr>
+        </p:nvSpPr>
+        <p:spPr/>
+        <p:txBody>
+          <a:bodyPr/>
+          <a:lstStyle/>
+          <a:p>
+            <a:r>
+              <a:rPr lang="en-GB"/>
+              <a:t>Modelling continuous outcomes</a:t>
+            </a:r>
+          </a:p>
+        </p:txBody>
+      </p:sp>
+      <p:sp>
+        <p:nvSpPr>
+          <p:cNvPr id="5" name="Slide Number Placeholder 4">
+            <a:extLst>
+              <a:ext uri="{FF2B5EF4-FFF2-40B4-BE49-F238E27FC236}">
+                <a16:creationId xmlns:a16="http://schemas.microsoft.com/office/drawing/2014/main" id="{19153079-52E8-3CBE-35A8-A200B180E5C2}"/>
+              </a:ext>
+            </a:extLst>
+          </p:cNvPr>
+          <p:cNvSpPr>
+            <a:spLocks noGrp="1"/>
+          </p:cNvSpPr>
+          <p:nvPr>
+            <p:ph type="sldNum" sz="quarter" idx="12"/>
+          </p:nvPr>
+        </p:nvSpPr>
+        <p:spPr/>
+        <p:txBody>
+          <a:bodyPr/>
+          <a:lstStyle/>
+          <a:p>
+            <a:fld id="{9FAA51BB-2FC0-4DB8-B50E-F52D50E733B6}" type="slidenum">
+              <a:rPr lang="en-GB" smtClean="0"/>
+              <a:t>29</a:t>
+            </a:fld>
+            <a:endParaRPr lang="en-GB"/>
+          </a:p>
+        </p:txBody>
+      </p:sp>
+      <p:sp>
+        <p:nvSpPr>
+          <p:cNvPr id="6" name="Card 1"/>
+          <p:cNvSpPr/>
+          <p:nvPr/>
+        </p:nvSpPr>
+        <p:spPr>
+          <a:xfrm>
+            <a:off x="758952" y="1417320"/>
+            <a:ext cx="5212080" cy="2103120"/>
+          </a:xfrm>
+          <a:prstGeom prst="roundRect">
+            <a:avLst>
+              <a:gd name="adj" fmla="val 8000"/>
+            </a:avLst>
+          </a:prstGeom>
+          <a:solidFill>
+            <a:srgbClr val="EEF3F7"/>
+          </a:solidFill>
+          <a:ln>
+            <a:noFill/>
+          </a:ln>
+        </p:spPr>
+        <p:txBody>
+          <a:bodyPr rtlCol="0" anchor="ctr"/>
+          <a:lstStyle/>
+          <a:p>
+            <a:endParaRPr/>
+          </a:p>
+        </p:txBody>
+      </p:sp>
+      <p:sp>
+        <p:nvSpPr>
+          <p:cNvPr id="7" name="Oval 6"/>
+          <p:cNvSpPr/>
+          <p:nvPr/>
+        </p:nvSpPr>
+        <p:spPr>
+          <a:xfrm>
+            <a:off x="987552" y="1645920"/>
+            <a:ext cx="566928" cy="566928"/>
+          </a:xfrm>
+          <a:prstGeom prst="ellipse">
+            <a:avLst/>
+          </a:prstGeom>
+          <a:solidFill>
+            <a:srgbClr val="1F394D"/>
+          </a:solidFill>
+          <a:ln>
+            <a:noFill/>
+          </a:ln>
+        </p:spPr>
+        <p:txBody>
+          <a:bodyPr lIns="0" tIns="0" rIns="0" bIns="0" rtlCol="0" anchor="ctr"/>
+          <a:lstStyle/>
+          <a:p>
+            <a:pPr algn="ctr"/>
+            <a:r>
+              <a:rPr sz="2000" b="1">
+                <a:solidFill>
+                  <a:srgbClr val="FFFFFF"/>
+                </a:solidFill>
+              </a:rPr>
+              <a:t>1</a:t>
+            </a:r>
+          </a:p>
+        </p:txBody>
+      </p:sp>
+      <p:sp>
+        <p:nvSpPr>
+          <p:cNvPr id="8" name="TextBox 7"/>
+          <p:cNvSpPr txBox="1"/>
+          <p:nvPr/>
+        </p:nvSpPr>
+        <p:spPr>
+          <a:xfrm>
+            <a:off x="1719072" y="1618488"/>
+            <a:ext cx="4023360" cy="640080"/>
+          </a:xfrm>
+          <a:prstGeom prst="rect">
+            <a:avLst/>
+          </a:prstGeom>
+          <a:noFill/>
+        </p:spPr>
+        <p:txBody>
+          <a:bodyPr wrap="square" lIns="0" tIns="0" rIns="0" bIns="0" anchor="ctr">
+            <a:spAutoFit/>
+          </a:bodyPr>
+          <a:lstStyle/>
+          <a:p>
+            <a:pPr algn="l"/>
+            <a:r>
+              <a:rPr sz="2000" b="1" i="0">
+                <a:solidFill>
+                  <a:srgbClr val="1F394D"/>
+                </a:solidFill>
+              </a:rPr>
+              <a:t>A line in real units</a:t>
+            </a:r>
+          </a:p>
+        </p:txBody>
+      </p:sp>
+      <p:sp>
+        <p:nvSpPr>
+          <p:cNvPr id="9" name="TextBox 8"/>
+          <p:cNvSpPr txBox="1"/>
+          <p:nvPr/>
+        </p:nvSpPr>
+        <p:spPr>
+          <a:xfrm>
+            <a:off x="1719072" y="2313432"/>
+            <a:ext cx="4023360" cy="1097279"/>
+          </a:xfrm>
+          <a:prstGeom prst="rect">
+            <a:avLst/>
+          </a:prstGeom>
+          <a:noFill/>
+        </p:spPr>
+        <p:txBody>
+          <a:bodyPr wrap="square" lIns="0" tIns="0" rIns="0" bIns="0" anchor="t">
+            <a:spAutoFit/>
+          </a:bodyPr>
+          <a:lstStyle/>
+          <a:p>
+            <a:pPr algn="l"/>
+            <a:r>
+              <a:rPr sz="1700" b="0" i="0">
+                <a:solidFill>
+                  <a:srgbClr val="1F2A33"/>
+                </a:solidFill>
+              </a:rPr>
+              <a:t>Slope = change in the outcome per one-unit change in the predictor.</a:t>
+            </a:r>
+          </a:p>
+        </p:txBody>
+      </p:sp>
+      <p:sp>
+        <p:nvSpPr>
+          <p:cNvPr id="10" name="Card 2"/>
+          <p:cNvSpPr/>
+          <p:nvPr/>
+        </p:nvSpPr>
+        <p:spPr>
+          <a:xfrm>
+            <a:off x="6153912" y="1417320"/>
+            <a:ext cx="5212080" cy="2103120"/>
+          </a:xfrm>
+          <a:prstGeom prst="roundRect">
+            <a:avLst>
+              <a:gd name="adj" fmla="val 8000"/>
+            </a:avLst>
+          </a:prstGeom>
+          <a:solidFill>
+            <a:srgbClr val="EEF3F7"/>
+          </a:solidFill>
+          <a:ln>
+            <a:noFill/>
+          </a:ln>
+        </p:spPr>
+        <p:txBody>
+          <a:bodyPr rtlCol="0" anchor="ctr"/>
+          <a:lstStyle/>
+          <a:p>
+            <a:endParaRPr/>
+          </a:p>
+        </p:txBody>
+      </p:sp>
+      <p:sp>
+        <p:nvSpPr>
+          <p:cNvPr id="11" name="Oval 10"/>
+          <p:cNvSpPr/>
+          <p:nvPr/>
+        </p:nvSpPr>
+        <p:spPr>
+          <a:xfrm>
+            <a:off x="6382512" y="1645920"/>
+            <a:ext cx="566928" cy="566928"/>
+          </a:xfrm>
+          <a:prstGeom prst="ellipse">
+            <a:avLst/>
+          </a:prstGeom>
+          <a:solidFill>
+            <a:srgbClr val="1F394D"/>
+          </a:solidFill>
+          <a:ln>
+            <a:noFill/>
+          </a:ln>
+        </p:spPr>
+        <p:txBody>
+          <a:bodyPr lIns="0" tIns="0" rIns="0" bIns="0" rtlCol="0" anchor="ctr"/>
+          <a:lstStyle/>
+          <a:p>
+            <a:pPr algn="ctr"/>
+            <a:r>
+              <a:rPr sz="2000" b="1">
+                <a:solidFill>
+                  <a:srgbClr val="FFFFFF"/>
+                </a:solidFill>
+              </a:rPr>
+              <a:t>2</a:t>
+            </a:r>
+          </a:p>
+        </p:txBody>
+      </p:sp>
+      <p:sp>
+        <p:nvSpPr>
+          <p:cNvPr id="12" name="TextBox 11"/>
+          <p:cNvSpPr txBox="1"/>
+          <p:nvPr/>
+        </p:nvSpPr>
+        <p:spPr>
+          <a:xfrm>
+            <a:off x="7114032" y="1618488"/>
+            <a:ext cx="4023360" cy="640080"/>
+          </a:xfrm>
+          <a:prstGeom prst="rect">
+            <a:avLst/>
+          </a:prstGeom>
+          <a:noFill/>
+        </p:spPr>
+        <p:txBody>
+          <a:bodyPr wrap="square" lIns="0" tIns="0" rIns="0" bIns="0" anchor="ctr">
+            <a:spAutoFit/>
+          </a:bodyPr>
+          <a:lstStyle/>
+          <a:p>
+            <a:pPr algn="l"/>
+            <a:r>
+              <a:rPr sz="2000" b="1" i="0">
+                <a:solidFill>
+                  <a:srgbClr val="1F394D"/>
+                </a:solidFill>
+              </a:rPr>
+              <a:t>Residuals and R²</a:t>
+            </a:r>
+          </a:p>
+        </p:txBody>
+      </p:sp>
+      <p:sp>
+        <p:nvSpPr>
+          <p:cNvPr id="13" name="TextBox 12"/>
+          <p:cNvSpPr txBox="1"/>
+          <p:nvPr/>
+        </p:nvSpPr>
+        <p:spPr>
+          <a:xfrm>
+            <a:off x="7114032" y="2313432"/>
+            <a:ext cx="4023360" cy="1097279"/>
+          </a:xfrm>
+          <a:prstGeom prst="rect">
+            <a:avLst/>
+          </a:prstGeom>
+          <a:noFill/>
+        </p:spPr>
+        <p:txBody>
+          <a:bodyPr wrap="square" lIns="0" tIns="0" rIns="0" bIns="0" anchor="t">
+            <a:spAutoFit/>
+          </a:bodyPr>
+          <a:lstStyle/>
+          <a:p>
+            <a:pPr algn="l"/>
+            <a:r>
+              <a:rPr sz="1700" b="0" i="0">
+                <a:solidFill>
+                  <a:srgbClr val="1F2A33"/>
+                </a:solidFill>
+              </a:rPr>
+              <a:t>What the line gets wrong, and the share of variation it explains.</a:t>
+            </a:r>
+          </a:p>
+        </p:txBody>
+      </p:sp>
+      <p:sp>
+        <p:nvSpPr>
+          <p:cNvPr id="14" name="Card 3"/>
+          <p:cNvSpPr/>
+          <p:nvPr/>
+        </p:nvSpPr>
+        <p:spPr>
+          <a:xfrm>
+            <a:off x="758952" y="3749039"/>
+            <a:ext cx="5212080" cy="2103120"/>
+          </a:xfrm>
+          <a:prstGeom prst="roundRect">
+            <a:avLst>
+              <a:gd name="adj" fmla="val 8000"/>
+            </a:avLst>
+          </a:prstGeom>
+          <a:solidFill>
+            <a:srgbClr val="EEF3F7"/>
+          </a:solidFill>
+          <a:ln>
+            <a:noFill/>
+          </a:ln>
+        </p:spPr>
+        <p:txBody>
+          <a:bodyPr rtlCol="0" anchor="ctr"/>
+          <a:lstStyle/>
+          <a:p>
+            <a:endParaRPr/>
+          </a:p>
+        </p:txBody>
+      </p:sp>
+      <p:sp>
+        <p:nvSpPr>
+          <p:cNvPr id="15" name="Oval 14"/>
+          <p:cNvSpPr/>
+          <p:nvPr/>
+        </p:nvSpPr>
+        <p:spPr>
+          <a:xfrm>
+            <a:off x="987552" y="3977639"/>
+            <a:ext cx="566928" cy="566928"/>
+          </a:xfrm>
+          <a:prstGeom prst="ellipse">
+            <a:avLst/>
+          </a:prstGeom>
+          <a:solidFill>
+            <a:srgbClr val="1F394D"/>
+          </a:solidFill>
+          <a:ln>
+            <a:noFill/>
+          </a:ln>
+        </p:spPr>
+        <p:txBody>
+          <a:bodyPr lIns="0" tIns="0" rIns="0" bIns="0" rtlCol="0" anchor="ctr"/>
+          <a:lstStyle/>
+          <a:p>
+            <a:pPr algn="ctr"/>
+            <a:r>
+              <a:rPr sz="2000" b="1">
+                <a:solidFill>
+                  <a:srgbClr val="FFFFFF"/>
+                </a:solidFill>
+              </a:rPr>
+              <a:t>3</a:t>
+            </a:r>
+          </a:p>
+        </p:txBody>
+      </p:sp>
+      <p:sp>
+        <p:nvSpPr>
+          <p:cNvPr id="16" name="TextBox 15"/>
+          <p:cNvSpPr txBox="1"/>
+          <p:nvPr/>
+        </p:nvSpPr>
+        <p:spPr>
+          <a:xfrm>
+            <a:off x="1719072" y="3950207"/>
+            <a:ext cx="4023360" cy="640080"/>
+          </a:xfrm>
+          <a:prstGeom prst="rect">
+            <a:avLst/>
+          </a:prstGeom>
+          <a:noFill/>
+        </p:spPr>
+        <p:txBody>
+          <a:bodyPr wrap="square" lIns="0" tIns="0" rIns="0" bIns="0" anchor="ctr">
+            <a:spAutoFit/>
+          </a:bodyPr>
+          <a:lstStyle/>
+          <a:p>
+            <a:pPr algn="l"/>
+            <a:r>
+              <a:rPr sz="2000" b="1" i="0">
+                <a:solidFill>
+                  <a:srgbClr val="1F394D"/>
+                </a:solidFill>
+              </a:rPr>
+              <a:t>Adjusting, not controlling</a:t>
+            </a:r>
+          </a:p>
+        </p:txBody>
+      </p:sp>
+      <p:sp>
+        <p:nvSpPr>
+          <p:cNvPr id="17" name="TextBox 16"/>
+          <p:cNvSpPr txBox="1"/>
+          <p:nvPr/>
+        </p:nvSpPr>
+        <p:spPr>
+          <a:xfrm>
+            <a:off x="1719072" y="4645152"/>
+            <a:ext cx="4023360" cy="1097279"/>
+          </a:xfrm>
+          <a:prstGeom prst="rect">
+            <a:avLst/>
+          </a:prstGeom>
+          <a:noFill/>
+        </p:spPr>
+        <p:txBody>
+          <a:bodyPr wrap="square" lIns="0" tIns="0" rIns="0" bIns="0" anchor="t">
+            <a:spAutoFit/>
+          </a:bodyPr>
+          <a:lstStyle/>
+          <a:p>
+            <a:pPr algn="l"/>
+            <a:r>
+              <a:rPr sz="1700" b="0" i="0">
+                <a:solidFill>
+                  <a:srgbClr val="1F2A33"/>
+                </a:solidFill>
+              </a:rPr>
+              <a:t>Multiple regression compares like with like statistically, not experimentally.</a:t>
+            </a:r>
+          </a:p>
+        </p:txBody>
+      </p:sp>
+      <p:sp>
+        <p:nvSpPr>
+          <p:cNvPr id="18" name="Card 4"/>
+          <p:cNvSpPr/>
+          <p:nvPr/>
+        </p:nvSpPr>
+        <p:spPr>
+          <a:xfrm>
+            <a:off x="6153912" y="3749039"/>
+            <a:ext cx="5212080" cy="2103120"/>
+          </a:xfrm>
+          <a:prstGeom prst="roundRect">
+            <a:avLst>
+              <a:gd name="adj" fmla="val 8000"/>
+            </a:avLst>
+          </a:prstGeom>
+          <a:solidFill>
+            <a:srgbClr val="EEF3F7"/>
+          </a:solidFill>
+          <a:ln>
+            <a:noFill/>
+          </a:ln>
+        </p:spPr>
+        <p:txBody>
+          <a:bodyPr rtlCol="0" anchor="ctr"/>
+          <a:lstStyle/>
+          <a:p>
+            <a:endParaRPr/>
+          </a:p>
+        </p:txBody>
+      </p:sp>
+      <p:sp>
+        <p:nvSpPr>
+          <p:cNvPr id="19" name="Oval 18"/>
+          <p:cNvSpPr/>
+          <p:nvPr/>
+        </p:nvSpPr>
+        <p:spPr>
+          <a:xfrm>
+            <a:off x="6382512" y="3977639"/>
+            <a:ext cx="566928" cy="566928"/>
+          </a:xfrm>
+          <a:prstGeom prst="ellipse">
+            <a:avLst/>
+          </a:prstGeom>
+          <a:solidFill>
+            <a:srgbClr val="1F394D"/>
+          </a:solidFill>
+          <a:ln>
+            <a:noFill/>
+          </a:ln>
+        </p:spPr>
+        <p:txBody>
+          <a:bodyPr lIns="0" tIns="0" rIns="0" bIns="0" rtlCol="0" anchor="ctr"/>
+          <a:lstStyle/>
+          <a:p>
+            <a:pPr algn="ctr"/>
+            <a:r>
+              <a:rPr sz="2000" b="1">
+                <a:solidFill>
+                  <a:srgbClr val="FFFFFF"/>
+                </a:solidFill>
+              </a:rPr>
+              <a:t>4</a:t>
+            </a:r>
+          </a:p>
+        </p:txBody>
+      </p:sp>
+      <p:sp>
+        <p:nvSpPr>
+          <p:cNvPr id="20" name="TextBox 19"/>
+          <p:cNvSpPr txBox="1"/>
+          <p:nvPr/>
+        </p:nvSpPr>
+        <p:spPr>
+          <a:xfrm>
+            <a:off x="7114032" y="3950207"/>
+            <a:ext cx="4023360" cy="640080"/>
+          </a:xfrm>
+          <a:prstGeom prst="rect">
+            <a:avLst/>
+          </a:prstGeom>
+          <a:noFill/>
+        </p:spPr>
+        <p:txBody>
+          <a:bodyPr wrap="square" lIns="0" tIns="0" rIns="0" bIns="0" anchor="ctr">
+            <a:spAutoFit/>
+          </a:bodyPr>
+          <a:lstStyle/>
+          <a:p>
+            <a:pPr algn="l"/>
+            <a:r>
+              <a:rPr sz="2000" b="1" i="0">
+                <a:solidFill>
+                  <a:srgbClr val="1F394D"/>
+                </a:solidFill>
+              </a:rPr>
+              <a:t>Categories are gaps</a:t>
+            </a:r>
+          </a:p>
+        </p:txBody>
+      </p:sp>
+      <p:sp>
+        <p:nvSpPr>
+          <p:cNvPr id="21" name="TextBox 20"/>
+          <p:cNvSpPr txBox="1"/>
+          <p:nvPr/>
+        </p:nvSpPr>
+        <p:spPr>
+          <a:xfrm>
+            <a:off x="7114032" y="4645152"/>
+            <a:ext cx="4023360" cy="1097279"/>
+          </a:xfrm>
+          <a:prstGeom prst="rect">
+            <a:avLst/>
+          </a:prstGeom>
+          <a:noFill/>
+        </p:spPr>
+        <p:txBody>
+          <a:bodyPr wrap="square" lIns="0" tIns="0" rIns="0" bIns="0" anchor="t">
+            <a:spAutoFit/>
+          </a:bodyPr>
+          <a:lstStyle/>
+          <a:p>
+            <a:pPr algn="l"/>
+            <a:r>
+              <a:rPr sz="1700" b="0" i="0">
+                <a:solidFill>
+                  <a:srgbClr val="1F2A33"/>
+                </a:solidFill>
+              </a:rPr>
+              <a:t>Each category’s coefficient is its difference from the reference group.</a:t>
+            </a:r>
+          </a:p>
+        </p:txBody>
+      </p:sp>
+    </p:spTree>
+  </p:cSld>
+  <p:clrMapOvr>
+    <a:masterClrMapping/>
+  </p:clrMapOvr>
+</p:sld>
+</file>
+
+<file path=ppt/slides/slide32.xml><?xml version="1.0" encoding="utf-8"?>
 <p:sld xmlns:a="http://schemas.openxmlformats.org/drawingml/2006/main" xmlns:r="http://schemas.openxmlformats.org/officeDocument/2006/relationships" xmlns:p="http://schemas.openxmlformats.org/presentationml/2006/main">
   <p:cSld>
     <p:spTree>
@@ -32719,7 +35821,7 @@
 </p:sld>
 </file>
 
-<file path=ppt/slides/slide31.xml><?xml version="1.0" encoding="utf-8"?>
+<file path=ppt/slides/slide33.xml><?xml version="1.0" encoding="utf-8"?>
 <p:sld xmlns:a="http://schemas.openxmlformats.org/drawingml/2006/main" xmlns:r="http://schemas.openxmlformats.org/officeDocument/2006/relationships" xmlns:p="http://schemas.openxmlformats.org/presentationml/2006/main">
   <p:cSld>
     <p:spTree>

--- a/Materials/Slides/slides_w3.pptx
+++ b/Materials/Slides/slides_w3.pptx
@@ -7388,7 +7388,7 @@
           <a:lstStyle/>
           <a:p>
             <a:r>
-              <a:t>The Week 3 Interactive Explorer page (https://cgmoreh.github.io/SOC2069-QUANT-26/Materials/Explorers/explorer_w3.html) has interactive versions of ideas from this lecture. Students can scan the code or follow the link from the course site and try the three tasks on the slide.</a:t>
+              <a:t>The Week 3 Interactive Explorer page (https://cgmoreh.github.io/SOC2069-QUANT-26/Materials/Explorers/explorer_w3.html) has interactive versions of ideas from this lecture. Students can scan the code or follow the link from the course site and try the four tasks on the slide. The fourth rebuilds the inequality coefficient of the two-predictor model (−7.15) from three simple regressions, following Allison (1998, pp. 109–112).</a:t>
             </a:r>
           </a:p>
         </p:txBody>
@@ -34521,7 +34521,7 @@
         <p:spPr>
           <a:xfrm>
             <a:off x="4526280" y="1417320"/>
-            <a:ext cx="6839712" cy="1097280"/>
+            <a:ext cx="6839712" cy="1026000"/>
           </a:xfrm>
           <a:prstGeom prst="roundRect">
             <a:avLst>
@@ -34551,7 +34551,7 @@
         </p:nvSpPr>
         <p:spPr>
           <a:xfrm>
-            <a:off x="4732020" y="1714500"/>
+            <a:off x="4732020" y="1678860"/>
             <a:ext cx="502920" cy="502920"/>
           </a:xfrm>
           <a:prstGeom prst="ellipse">
@@ -34589,7 +34589,7 @@
         </p:nvSpPr>
         <p:spPr>
           <a:xfrm>
-            <a:off x="5440680" y="1527048"/>
+            <a:off x="5440680" y="1491408"/>
             <a:ext cx="5760720" cy="877824"/>
           </a:xfrm>
           <a:prstGeom prst="rect">
@@ -34640,8 +34640,8 @@
         </p:nvSpPr>
         <p:spPr>
           <a:xfrm>
-            <a:off x="4526280" y="2651760"/>
-            <a:ext cx="6839712" cy="1097280"/>
+            <a:off x="4526280" y="2569320"/>
+            <a:ext cx="6839712" cy="1026000"/>
           </a:xfrm>
           <a:prstGeom prst="roundRect">
             <a:avLst>
@@ -34671,7 +34671,7 @@
         </p:nvSpPr>
         <p:spPr>
           <a:xfrm>
-            <a:off x="4732020" y="2948940"/>
+            <a:off x="4732020" y="2830860"/>
             <a:ext cx="502920" cy="502920"/>
           </a:xfrm>
           <a:prstGeom prst="ellipse">
@@ -34709,7 +34709,7 @@
         </p:nvSpPr>
         <p:spPr>
           <a:xfrm>
-            <a:off x="5440680" y="2761488"/>
+            <a:off x="5440680" y="2643408"/>
             <a:ext cx="5760720" cy="877824"/>
           </a:xfrm>
           <a:prstGeom prst="rect">
@@ -34760,8 +34760,8 @@
         </p:nvSpPr>
         <p:spPr>
           <a:xfrm>
-            <a:off x="4526280" y="3886200"/>
-            <a:ext cx="6839712" cy="1097280"/>
+            <a:off x="4526280" y="3721320"/>
+            <a:ext cx="6839712" cy="1026000"/>
           </a:xfrm>
           <a:prstGeom prst="roundRect">
             <a:avLst>
@@ -34791,7 +34791,7 @@
         </p:nvSpPr>
         <p:spPr>
           <a:xfrm>
-            <a:off x="4732020" y="4183379"/>
+            <a:off x="4732020" y="3982860"/>
             <a:ext cx="502920" cy="502920"/>
           </a:xfrm>
           <a:prstGeom prst="ellipse">
@@ -34829,7 +34829,7 @@
         </p:nvSpPr>
         <p:spPr>
           <a:xfrm>
-            <a:off x="5440680" y="3995928"/>
+            <a:off x="5440680" y="3795408"/>
             <a:ext cx="5760720" cy="877824"/>
           </a:xfrm>
           <a:prstGeom prst="rect">
@@ -34874,19 +34874,48 @@
       </p:sp>
       <p:sp>
         <p:nvSpPr>
-          <p:cNvPr id="17" name="Rounded Rectangle 16"/>
+          <p:cNvPr id="19" name="Rounded Rectangle 18"/>
           <p:cNvSpPr/>
           <p:nvPr/>
         </p:nvSpPr>
         <p:spPr>
           <a:xfrm>
-            <a:off x="4526280" y="5120640"/>
-            <a:ext cx="6839712" cy="731520"/>
+            <a:off x="4526280" y="4873320"/>
+            <a:ext cx="6839712" cy="1026000"/>
           </a:xfrm>
           <a:prstGeom prst="roundRect">
             <a:avLst>
               <a:gd name="adj" fmla="val 8000"/>
             </a:avLst>
+          </a:prstGeom>
+          <a:solidFill>
+            <a:srgbClr val="EEF3F7"/>
+          </a:solidFill>
+          <a:ln>
+            <a:noFill/>
+          </a:ln>
+        </p:spPr>
+        <p:txBody>
+          <a:bodyPr rtlCol="0" anchor="ctr"/>
+          <a:lstStyle/>
+          <a:p>
+            <a:pPr algn="ctr"/>
+          </a:p>
+        </p:txBody>
+      </p:sp>
+      <p:sp>
+        <p:nvSpPr>
+          <p:cNvPr id="20" name="Oval 19"/>
+          <p:cNvSpPr/>
+          <p:nvPr/>
+        </p:nvSpPr>
+        <p:spPr>
+          <a:xfrm>
+            <a:off x="4732020" y="5134860"/>
+            <a:ext cx="502920" cy="502920"/>
+          </a:xfrm>
+          <a:prstGeom prst="ellipse">
+            <a:avLst/>
           </a:prstGeom>
           <a:solidFill>
             <a:srgbClr val="1F394D"/>
@@ -34896,6 +34925,97 @@
           </a:ln>
         </p:spPr>
         <p:txBody>
+          <a:bodyPr rtlCol="0" anchor="ctr" wrap="square" lIns="0" rIns="0" tIns="18288" bIns="18288"/>
+          <a:lstStyle/>
+          <a:p>
+            <a:pPr algn="ctr"/>
+            <a:r>
+              <a:rPr sz="1800" b="1" i="0">
+                <a:solidFill>
+                  <a:srgbClr val="FFFFFF"/>
+                </a:solidFill>
+              </a:rPr>
+              <a:t>4</a:t>
+            </a:r>
+            <a:endParaRPr sz="1800"/>
+          </a:p>
+        </p:txBody>
+      </p:sp>
+      <p:sp>
+        <p:nvSpPr>
+          <p:cNvPr id="21" name="TextBox 20"/>
+          <p:cNvSpPr txBox="1"/>
+          <p:nvPr/>
+        </p:nvSpPr>
+        <p:spPr>
+          <a:xfrm>
+            <a:off x="5440680" y="4947408"/>
+            <a:ext cx="5760720" cy="877824"/>
+          </a:xfrm>
+          <a:prstGeom prst="rect">
+            <a:avLst/>
+          </a:prstGeom>
+          <a:noFill/>
+        </p:spPr>
+        <p:txBody>
+          <a:bodyPr wrap="square" lIns="0" rIns="0" tIns="0" bIns="0" anchor="ctr">
+            <a:spAutoFit/>
+          </a:bodyPr>
+          <a:lstStyle/>
+          <a:p>
+            <a:pPr algn="l">
+              <a:spcAft>
+                <a:spcPts val="200"/>
+              </a:spcAft>
+            </a:pPr>
+            <a:r>
+              <a:rPr sz="1800" b="1" i="0">
+                <a:solidFill>
+                  <a:srgbClr val="1F394D"/>
+                </a:solidFill>
+              </a:rPr>
+              <a:t>Adjusting for homicide rates</a:t>
+            </a:r>
+            <a:endParaRPr sz="1800"/>
+          </a:p>
+          <a:p>
+            <a:pPr algn="l"/>
+            <a:r>
+              <a:rPr sz="1500" b="0" i="0">
+                <a:solidFill>
+                  <a:srgbClr val="1F2A33"/>
+                </a:solidFill>
+              </a:rPr>
+              <a:t>Rebuild the coefficient of −7.15 from three simple regressions, following one country through each step.</a:t>
+            </a:r>
+            <a:endParaRPr sz="1500"/>
+          </a:p>
+        </p:txBody>
+      </p:sp>
+      <p:sp>
+        <p:nvSpPr>
+          <p:cNvPr id="17" name="Rounded Rectangle 16"/>
+          <p:cNvSpPr/>
+          <p:nvPr/>
+        </p:nvSpPr>
+        <p:spPr>
+          <a:xfrm>
+            <a:off x="758952" y="5040000"/>
+            <a:ext cx="3429000" cy="859320"/>
+          </a:xfrm>
+          <a:prstGeom prst="roundRect">
+            <a:avLst>
+              <a:gd name="adj" fmla="val 8000"/>
+            </a:avLst>
+          </a:prstGeom>
+          <a:solidFill>
+            <a:srgbClr val="1F394D"/>
+          </a:solidFill>
+          <a:ln>
+            <a:noFill/>
+          </a:ln>
+        </p:spPr>
+        <p:txBody>
           <a:bodyPr rtlCol="0" anchor="ctr"/>
           <a:lstStyle/>
           <a:p>
@@ -34911,8 +35031,8 @@
         </p:nvSpPr>
         <p:spPr>
           <a:xfrm>
-            <a:off x="4754880" y="5120640"/>
-            <a:ext cx="6400800" cy="731520"/>
+            <a:off x="902952" y="5040000"/>
+            <a:ext cx="3141000" cy="859320"/>
           </a:xfrm>
           <a:prstGeom prst="rect">
             <a:avLst/>
